--- a/docs/공동영농_최종발표.pptx
+++ b/docs/공동영농_최종발표.pptx
@@ -34670,7 +34670,7 @@
                             <a:srgbClr val="262B33"/>
                           </a:solidFill>
                         </a:rPr>
-                        <a:t>거절 필지를 지도에서 클릭하면 지원 기준 충족 여부, 대체 필지·경작권 교환 후보 순위, 트랙터 경로, 평당 배당 범위와 흉년 시 변화를 바로 보여 주는 "빈 필드 시뮬레이터"</a:t>
+                        <a:t>농가가 참여를 거절했을 때, 대신 묶을 땅과 달라지는 배당금을 바로 알려 주는 공동영농 시뮬레이터</a:t>
                       </a:r>
                       <a:endParaRPr b="0" sz="1400">
                         <a:latin typeface="Arial"/>

--- a/docs/공동영농_최종발표.pptx
+++ b/docs/공동영농_최종발표.pptx
@@ -13,8 +13,6 @@
     <p:sldId id="257" r:id="rId8"/>
     <p:sldId id="258" r:id="rId9"/>
     <p:sldId id="259" r:id="rId10"/>
-    <p:sldId id="261" r:id="rId13"/>
-    <p:sldId id="262" r:id="rId14"/>
     <p:sldId id="260" r:id="rId11"/>
   </p:sldIdLst>
   <p:sldSz cy="6858000" cx="12192000"/>
@@ -1613,7 +1611,7 @@
           <a:lstStyle/>
           <a:p>
             <a:r>
-              <a:t>의도: 공동영농 법인이 참여 농가를 설득하다가 거절이 나왔을 때, 그 한 건이 지원 자격(면적 기준)과 조합원 평당 배당에 어떤 영향을 주는지 즉시 보여 주는 의사결정 도구다. 주 고객은 법인 대표·사무장이고, 지자체·농지은행은 교환·편입을 중개하는 확장 고객이다. 수익 모델(단지별 구독, B2G 용역)은 인터뷰로 검증할 가설이다.</a:t>
+              <a:t>의도: 공동영농 법인이 참여 농가를 설득하다가 거절이 나왔을 때, 그 한 건이 지원 자격(면적 기준)과 조합원 평당 배당에 주는 영향을 즉시 보여 주는 의사결정 도구다. 가치제안(❶)을 기준점으로 고객군 → 채널 → 고객 관계 → 수익 → 핵심 활동·자원·파트너 → 비용 순서로 모든 블록을 "~할 것이다" 가설로 적었다. 핵심 자원의 프로토타입만 확인된 사실이고 나머지는 인터뷰로 검증할 가설이다.</a:t>
             </a:r>
           </a:p>
         </p:txBody>
@@ -1825,19 +1823,9 @@
           </a:bodyPr>
           <a:lstStyle/>
           <a:p>
-            <a:pPr indent="0" lvl="0" marL="0" rtl="0" algn="l">
-              <a:spcBef>
-                <a:spcPts val="0"/>
-              </a:spcBef>
-              <a:spcAft>
-                <a:spcPts val="0"/>
-              </a:spcAft>
-              <a:buNone/>
-            </a:pPr>
             <a:r>
-              <a:t/>
+              <a:t>질문 원칙: 의견이 아니라 경험한 상황을 묻는다(마지막 경험, 시간·비용, 실제 행동). 개방형으로 묻는다. "쓰시겠어요?", "얼마 내시겠어요?" 같은 미래형·평가 질문은 하지 않는다. 순서: 문제 탐색 → 문제 강도 → 기존 대안. 솔루션 질문은 고객·문제 가설(CPF)을 확인한 뒤에만 한다.</a:t>
             </a:r>
-            <a:endParaRPr/>
           </a:p>
         </p:txBody>
       </p:sp>
@@ -34551,12 +34539,15 @@
                         <a:buNone/>
                       </a:pPr>
                       <a:r>
-                        <a:rPr sz="1300" b="0">
+                        <a:rPr sz="1400">
                           <a:solidFill>
                             <a:srgbClr val="FFFFFF"/>
                           </a:solidFill>
+                          <a:latin typeface="Freesentation 4 Regular"/>
+                          <a:ea typeface="Freesentation 4 Regular"/>
+                          <a:cs typeface="Freesentation 4 Regular"/>
                         </a:rPr>
-                        <a:t>들녘 공동영농을 추진하며 참여 농가를 설득 중인 농업법인 (대표·사무장)</a:t>
+                        <a:t>들녘 공동영농을 추진하며 참여 농가를 설득 중인 농업법인 대표·사무장</a:t>
                       </a:r>
                       <a:endParaRPr b="0" sz="1400">
                         <a:latin typeface="Arial"/>
@@ -34665,10 +34656,13 @@
                         <a:buNone/>
                       </a:pPr>
                       <a:r>
-                        <a:rPr sz="1300" b="0">
+                        <a:rPr sz="1400">
                           <a:solidFill>
                             <a:srgbClr val="262B33"/>
                           </a:solidFill>
+                          <a:latin typeface="Freesentation 4 Regular"/>
+                          <a:ea typeface="Freesentation 4 Regular"/>
+                          <a:cs typeface="Freesentation 4 Regular"/>
                         </a:rPr>
                         <a:t>농가가 참여를 거절했을 때, 대신 묶을 땅과 달라지는 배당금을 바로 알려 주는 공동영농 시뮬레이터</a:t>
                       </a:r>
@@ -34779,12 +34773,15 @@
                         <a:buNone/>
                       </a:pPr>
                       <a:r>
-                        <a:rPr sz="1300" b="0">
+                        <a:rPr sz="1400">
                           <a:solidFill>
                             <a:srgbClr val="262B33"/>
                           </a:solidFill>
+                          <a:latin typeface="Freesentation 4 Regular"/>
+                          <a:ea typeface="Freesentation 4 Regular"/>
+                          <a:cs typeface="Freesentation 4 Regular"/>
                         </a:rPr>
-                        <a:t>일부 농가가 참여를 거절해 필드에 구멍이 나면, 법인은 최소 면적 기준을 지킬 수 있는지와 순수익(평당 배당)이 얼마나 줄어드는지 몰라 대안을 감으로 정한다</a:t>
+                        <a:t>거절로 필드에 구멍이 나면 지원 면적 기준을 지킬 수 있는지, 평당 배당이 얼마나 줄지 몰라 대안을 감으로 정한다</a:t>
                       </a:r>
                       <a:endParaRPr b="0" sz="1400">
                         <a:latin typeface="Arial"/>
@@ -35538,20 +35535,22 @@
           </a:bodyPr>
           <a:lstStyle/>
           <a:p>
-            <a:pPr marL="139700" indent="-139700">
+            <a:pPr marL="0" indent="0">
               <a:spcAft>
-                <a:spcPts val="200"/>
+                <a:spcPts val="400"/>
               </a:spcAft>
-              <a:buFont typeface="Arial"/>
-              <a:buChar char="•"/>
+              <a:buNone/>
             </a:pPr>
             <a:r>
-              <a:rPr sz="1100" b="0">
+              <a:rPr sz="1100">
                 <a:solidFill>
-                  <a:srgbClr val="262B33"/>
+                  <a:srgbClr val="1B5E7F"/>
                 </a:solidFill>
+                <a:latin typeface="Freesentation 6 SemiBold"/>
+                <a:ea typeface="Freesentation 6 SemiBold"/>
+                <a:cs typeface="Freesentation 6 SemiBold"/>
               </a:rPr>
-              <a:t>시·군 농정부서 (공동영농 시범사업 운영)</a:t>
+              <a:t>❽ 핵심 파트너</a:t>
             </a:r>
           </a:p>
           <a:p>
@@ -35563,12 +35562,15 @@
               <a:buChar char="•"/>
             </a:pPr>
             <a:r>
-              <a:rPr sz="1100" b="0">
+              <a:rPr sz="1100">
                 <a:solidFill>
                   <a:srgbClr val="262B33"/>
                 </a:solidFill>
+                <a:latin typeface="Freesentation 4 Regular"/>
+                <a:ea typeface="Freesentation 4 Regular"/>
+                <a:cs typeface="Freesentation 4 Regular"/>
               </a:rPr>
-              <a:t>한국농어촌공사 농지은행 (임대·교환 중개)</a:t>
+              <a:t>시·군 농정부서, 농어촌공사 농지은행이 대체 필지·교환 중개를 맡아 줄 것이다</a:t>
             </a:r>
           </a:p>
           <a:p>
@@ -35580,12 +35582,15 @@
               <a:buChar char="•"/>
             </a:pPr>
             <a:r>
-              <a:rPr sz="1100" b="0">
+              <a:rPr sz="1100">
                 <a:solidFill>
                   <a:srgbClr val="262B33"/>
                 </a:solidFill>
+                <a:latin typeface="Freesentation 4 Regular"/>
+                <a:ea typeface="Freesentation 4 Regular"/>
+                <a:cs typeface="Freesentation 4 Regular"/>
               </a:rPr>
-              <a:t>경북 공동영농 협의체, 농협</a:t>
+              <a:t>팜맵·흙토람·브이월드 공공 데이터로 들녘 지도를 만들 것이다</a:t>
             </a:r>
           </a:p>
           <a:p>
@@ -35597,29 +35602,15 @@
               <a:buChar char="•"/>
             </a:pPr>
             <a:r>
-              <a:rPr sz="1100" b="0">
+              <a:rPr sz="1100">
                 <a:solidFill>
                   <a:srgbClr val="262B33"/>
                 </a:solidFill>
+                <a:latin typeface="Freesentation 4 Regular"/>
+                <a:ea typeface="Freesentation 4 Regular"/>
+                <a:cs typeface="Freesentation 4 Regular"/>
               </a:rPr>
-              <a:t>공공 데이터: 팜맵, 흙토람, 브이월드 연속지적도</a:t>
-            </a:r>
-          </a:p>
-          <a:p>
-            <a:pPr marL="139700" indent="-139700">
-              <a:spcAft>
-                <a:spcPts val="200"/>
-              </a:spcAft>
-              <a:buFont typeface="Arial"/>
-              <a:buChar char="•"/>
-            </a:pPr>
-            <a:r>
-              <a:rPr sz="1100" b="0">
-                <a:solidFill>
-                  <a:srgbClr val="262B33"/>
-                </a:solidFill>
-              </a:rPr>
-              <a:t>농촌진흥청 소득자료, 농기계 임대사업소</a:t>
+              <a:t>농촌진흥청 소득자료로 배당 계산 근거를 댈 것이다</a:t>
             </a:r>
           </a:p>
         </p:txBody>
@@ -35646,20 +35637,22 @@
           </a:bodyPr>
           <a:lstStyle/>
           <a:p>
-            <a:pPr marL="139700" indent="-139700">
+            <a:pPr marL="0" indent="0">
               <a:spcAft>
-                <a:spcPts val="200"/>
+                <a:spcPts val="400"/>
               </a:spcAft>
-              <a:buFont typeface="Arial"/>
-              <a:buChar char="•"/>
+              <a:buNone/>
             </a:pPr>
             <a:r>
-              <a:rPr sz="1100" b="0">
+              <a:rPr sz="1100">
                 <a:solidFill>
-                  <a:srgbClr val="262B33"/>
+                  <a:srgbClr val="1B5E7F"/>
                 </a:solidFill>
+                <a:latin typeface="Freesentation 6 SemiBold"/>
+                <a:ea typeface="Freesentation 6 SemiBold"/>
+                <a:cs typeface="Freesentation 6 SemiBold"/>
               </a:rPr>
-              <a:t>거절 필지 즉시 재계산 엔진 운영</a:t>
+              <a:t>❻ 핵심 활동</a:t>
             </a:r>
           </a:p>
           <a:p>
@@ -35671,12 +35664,15 @@
               <a:buChar char="•"/>
             </a:pPr>
             <a:r>
-              <a:rPr sz="1100" b="0">
+              <a:rPr sz="1100">
                 <a:solidFill>
                   <a:srgbClr val="262B33"/>
                 </a:solidFill>
+                <a:latin typeface="Freesentation 4 Regular"/>
+                <a:ea typeface="Freesentation 4 Regular"/>
+                <a:cs typeface="Freesentation 4 Regular"/>
               </a:rPr>
-              <a:t>대체 후보·경작권 교환 최적화</a:t>
+              <a:t>거절 재계산 엔진 운영, 들녘별 자료 보정을 할 것이다</a:t>
             </a:r>
           </a:p>
           <a:p>
@@ -35688,29 +35684,15 @@
               <a:buChar char="•"/>
             </a:pPr>
             <a:r>
-              <a:rPr sz="1100" b="0">
+              <a:rPr sz="1100">
                 <a:solidFill>
                   <a:srgbClr val="262B33"/>
                 </a:solidFill>
+                <a:latin typeface="Freesentation 4 Regular"/>
+                <a:ea typeface="Freesentation 4 Regular"/>
+                <a:cs typeface="Freesentation 4 Regular"/>
               </a:rPr>
-              <a:t>들녘별 소득·기계비 자료 보정</a:t>
-            </a:r>
-          </a:p>
-          <a:p>
-            <a:pPr marL="139700" indent="-139700">
-              <a:spcAft>
-                <a:spcPts val="200"/>
-              </a:spcAft>
-              <a:buFont typeface="Arial"/>
-              <a:buChar char="•"/>
-            </a:pPr>
-            <a:r>
-              <a:rPr sz="1100" b="0">
-                <a:solidFill>
-                  <a:srgbClr val="262B33"/>
-                </a:solidFill>
-              </a:rPr>
-              <a:t>법인 현장 온보딩</a:t>
+              <a:t>핵심지표: 재설계 소요일, 기준 충족 단지 수</a:t>
             </a:r>
           </a:p>
         </p:txBody>
@@ -35737,20 +35719,22 @@
           </a:bodyPr>
           <a:lstStyle/>
           <a:p>
-            <a:pPr marL="139700" indent="-139700">
+            <a:pPr marL="0" indent="0">
               <a:spcAft>
-                <a:spcPts val="200"/>
+                <a:spcPts val="400"/>
               </a:spcAft>
-              <a:buFont typeface="Arial"/>
-              <a:buChar char="•"/>
+              <a:buNone/>
             </a:pPr>
             <a:r>
-              <a:rPr sz="1100" b="0">
+              <a:rPr sz="1100">
                 <a:solidFill>
-                  <a:srgbClr val="262B33"/>
+                  <a:srgbClr val="1B5E7F"/>
                 </a:solidFill>
+                <a:latin typeface="Freesentation 6 SemiBold"/>
+                <a:ea typeface="Freesentation 6 SemiBold"/>
+                <a:cs typeface="Freesentation 6 SemiBold"/>
               </a:rPr>
-              <a:t>필지 인접 그래프·비용 모델</a:t>
+              <a:t>❼ 핵심 자원</a:t>
             </a:r>
           </a:p>
           <a:p>
@@ -35762,12 +35746,15 @@
               <a:buChar char="•"/>
             </a:pPr>
             <a:r>
-              <a:rPr sz="1100" b="0">
+              <a:rPr sz="1100">
                 <a:solidFill>
                   <a:srgbClr val="262B33"/>
                 </a:solidFill>
+                <a:latin typeface="Freesentation 4 Regular"/>
+                <a:ea typeface="Freesentation 4 Regular"/>
+                <a:cs typeface="Freesentation 4 Regular"/>
               </a:rPr>
-              <a:t>교환 최적화, 작목 배치, 기여도(샤플리) 배분 알고리즘</a:t>
+              <a:t>필지 인접 그래프·비용 모델, 교환·배분 최적화</a:t>
             </a:r>
           </a:p>
           <a:p>
@@ -35779,12 +35766,15 @@
               <a:buChar char="•"/>
             </a:pPr>
             <a:r>
-              <a:rPr sz="1100" b="0">
+              <a:rPr sz="1100">
                 <a:solidFill>
                   <a:srgbClr val="262B33"/>
                 </a:solidFill>
+                <a:latin typeface="Freesentation 4 Regular"/>
+                <a:ea typeface="Freesentation 4 Regular"/>
+                <a:cs typeface="Freesentation 4 Regular"/>
               </a:rPr>
-              <a:t>공공 지도·토양 데이터 연동</a:t>
+              <a:t>흥해 들녘 실측 2,666필지 연동 프로토타입 (보유)</a:t>
             </a:r>
           </a:p>
         </p:txBody>
@@ -35813,17 +35803,39 @@
           <a:p>
             <a:pPr marL="0" indent="0">
               <a:spcAft>
+                <a:spcPts val="400"/>
+              </a:spcAft>
+              <a:buNone/>
+            </a:pPr>
+            <a:r>
+              <a:rPr sz="1100">
+                <a:solidFill>
+                  <a:srgbClr val="1B5E7F"/>
+                </a:solidFill>
+                <a:latin typeface="Freesentation 6 SemiBold"/>
+                <a:ea typeface="Freesentation 6 SemiBold"/>
+                <a:cs typeface="Freesentation 6 SemiBold"/>
+              </a:rPr>
+              <a:t>❶ 가치제안</a:t>
+            </a:r>
+          </a:p>
+          <a:p>
+            <a:pPr marL="0" indent="0">
+              <a:spcAft>
                 <a:spcPts val="600"/>
               </a:spcAft>
               <a:buNone/>
             </a:pPr>
             <a:r>
-              <a:rPr sz="1100" b="1">
+              <a:rPr sz="1100">
                 <a:solidFill>
                   <a:srgbClr val="262B33"/>
                 </a:solidFill>
+                <a:latin typeface="Freesentation 5 Medium"/>
+                <a:ea typeface="Freesentation 5 Medium"/>
+                <a:cs typeface="Freesentation 5 Medium"/>
               </a:rPr>
-              <a:t>거절 한 건이 지원 자격과 평당 배당에 주는 영향을 1초 안에</a:t>
+              <a:t>거절 필지가 지원 자격과 평당 배당에 주는 영향을 1초 안에 보여 줘, 대안 결정 기간을 2주에서 1일로 줄일 것이다</a:t>
             </a:r>
           </a:p>
           <a:p>
@@ -35835,10 +35847,13 @@
               <a:buChar char="•"/>
             </a:pPr>
             <a:r>
-              <a:rPr sz="1100" b="0">
+              <a:rPr sz="1100">
                 <a:solidFill>
                   <a:srgbClr val="262B33"/>
                 </a:solidFill>
+                <a:latin typeface="Freesentation 4 Regular"/>
+                <a:ea typeface="Freesentation 4 Regular"/>
+                <a:cs typeface="Freesentation 4 Regular"/>
               </a:rPr>
               <a:t>지원 기준(면적·농가 수·연결성) 즉시 판정</a:t>
             </a:r>
@@ -35852,12 +35867,15 @@
               <a:buChar char="•"/>
             </a:pPr>
             <a:r>
-              <a:rPr sz="1100" b="0">
+              <a:rPr sz="1100">
                 <a:solidFill>
                   <a:srgbClr val="262B33"/>
                 </a:solidFill>
+                <a:latin typeface="Freesentation 4 Regular"/>
+                <a:ea typeface="Freesentation 4 Regular"/>
+                <a:cs typeface="Freesentation 4 Regular"/>
               </a:rPr>
-              <a:t>대체 안을 최적 1 + 예비 2로 추천 (땅 추가·경작권 교환·경로 재최적화)</a:t>
+              <a:t>대체 필지·경작권 교환 후보 최적 1 + 예비 2</a:t>
             </a:r>
           </a:p>
           <a:p>
@@ -35869,29 +35887,15 @@
               <a:buChar char="•"/>
             </a:pPr>
             <a:r>
-              <a:rPr sz="1100" b="0">
+              <a:rPr sz="1100">
                 <a:solidFill>
                   <a:srgbClr val="262B33"/>
                 </a:solidFill>
+                <a:latin typeface="Freesentation 4 Regular"/>
+                <a:ea typeface="Freesentation 4 Regular"/>
+                <a:cs typeface="Freesentation 4 Regular"/>
               </a:rPr>
-              <a:t>평당 배당을 범위로, 흉년 스트레스 테스트</a:t>
-            </a:r>
-          </a:p>
-          <a:p>
-            <a:pPr marL="139700" indent="-139700">
-              <a:spcAft>
-                <a:spcPts val="200"/>
-              </a:spcAft>
-              <a:buFont typeface="Arial"/>
-              <a:buChar char="•"/>
-            </a:pPr>
-            <a:r>
-              <a:rPr sz="1100" b="0">
-                <a:solidFill>
-                  <a:srgbClr val="262B33"/>
-                </a:solidFill>
-              </a:rPr>
-              <a:t>설득 카드: 농가별 평당 최대 제시액</a:t>
+              <a:t>평당 배당 범위와 흉년 시 금액</a:t>
             </a:r>
           </a:p>
         </p:txBody>
@@ -35918,20 +35922,22 @@
           </a:bodyPr>
           <a:lstStyle/>
           <a:p>
-            <a:pPr marL="139700" indent="-139700">
+            <a:pPr marL="0" indent="0">
               <a:spcAft>
-                <a:spcPts val="200"/>
+                <a:spcPts val="400"/>
               </a:spcAft>
-              <a:buFont typeface="Arial"/>
-              <a:buChar char="•"/>
+              <a:buNone/>
             </a:pPr>
             <a:r>
-              <a:rPr sz="1100" b="0">
+              <a:rPr sz="1100">
                 <a:solidFill>
-                  <a:srgbClr val="262B33"/>
+                  <a:srgbClr val="1B5E7F"/>
                 </a:solidFill>
+                <a:latin typeface="Freesentation 6 SemiBold"/>
+                <a:ea typeface="Freesentation 6 SemiBold"/>
+                <a:cs typeface="Freesentation 6 SemiBold"/>
               </a:rPr>
-              <a:t>설득 기간 현장 동행 지원 (초기)</a:t>
+              <a:t>❹ 고객 관계</a:t>
             </a:r>
           </a:p>
           <a:p>
@@ -35943,29 +35949,15 @@
               <a:buChar char="•"/>
             </a:pPr>
             <a:r>
-              <a:rPr sz="1100" b="0">
+              <a:rPr sz="1100">
                 <a:solidFill>
                   <a:srgbClr val="262B33"/>
                 </a:solidFill>
+                <a:latin typeface="Freesentation 4 Regular"/>
+                <a:ea typeface="Freesentation 4 Regular"/>
+                <a:cs typeface="Freesentation 4 Regular"/>
               </a:rPr>
-              <a:t>이후 셀프서비스 웹 도구</a:t>
-            </a:r>
-          </a:p>
-          <a:p>
-            <a:pPr marL="139700" indent="-139700">
-              <a:spcAft>
-                <a:spcPts val="200"/>
-              </a:spcAft>
-              <a:buFont typeface="Arial"/>
-              <a:buChar char="•"/>
-            </a:pPr>
-            <a:r>
-              <a:rPr sz="1100" b="0">
-                <a:solidFill>
-                  <a:srgbClr val="262B33"/>
-                </a:solidFill>
-              </a:rPr>
-              <a:t>매년 소득·비용 자료 갱신</a:t>
+              <a:t>설득 기간 현장 동행(Get) → 셀프 웹 도구(Keep) → 다음 단지 확장(Grow)으로 이어 갈 것이다</a:t>
             </a:r>
           </a:p>
         </p:txBody>
@@ -35992,20 +35984,22 @@
           </a:bodyPr>
           <a:lstStyle/>
           <a:p>
-            <a:pPr marL="139700" indent="-139700">
+            <a:pPr marL="0" indent="0">
               <a:spcAft>
-                <a:spcPts val="200"/>
+                <a:spcPts val="400"/>
               </a:spcAft>
-              <a:buFont typeface="Arial"/>
-              <a:buChar char="•"/>
+              <a:buNone/>
             </a:pPr>
             <a:r>
-              <a:rPr sz="1100" b="0">
+              <a:rPr sz="1100">
                 <a:solidFill>
-                  <a:srgbClr val="262B33"/>
+                  <a:srgbClr val="1B5E7F"/>
                 </a:solidFill>
+                <a:latin typeface="Freesentation 6 SemiBold"/>
+                <a:ea typeface="Freesentation 6 SemiBold"/>
+                <a:cs typeface="Freesentation 6 SemiBold"/>
               </a:rPr>
-              <a:t>지자체 공동영농 시범사업 연계</a:t>
+              <a:t>❸ 채널</a:t>
             </a:r>
           </a:p>
           <a:p>
@@ -36017,46 +36011,15 @@
               <a:buChar char="•"/>
             </a:pPr>
             <a:r>
-              <a:rPr sz="1100" b="0">
+              <a:rPr sz="1100">
                 <a:solidFill>
                   <a:srgbClr val="262B33"/>
                 </a:solidFill>
+                <a:latin typeface="Freesentation 4 Regular"/>
+                <a:ea typeface="Freesentation 4 Regular"/>
+                <a:cs typeface="Freesentation 4 Regular"/>
               </a:rPr>
-              <a:t>농지은행 지사, 농협</a:t>
-            </a:r>
-          </a:p>
-          <a:p>
-            <a:pPr marL="139700" indent="-139700">
-              <a:spcAft>
-                <a:spcPts val="200"/>
-              </a:spcAft>
-              <a:buFont typeface="Arial"/>
-              <a:buChar char="•"/>
-            </a:pPr>
-            <a:r>
-              <a:rPr sz="1100" b="0">
-                <a:solidFill>
-                  <a:srgbClr val="262B33"/>
-                </a:solidFill>
-              </a:rPr>
-              <a:t>농업법인 교육·협의체</a:t>
-            </a:r>
-          </a:p>
-          <a:p>
-            <a:pPr marL="139700" indent="-139700">
-              <a:spcAft>
-                <a:spcPts val="200"/>
-              </a:spcAft>
-              <a:buFont typeface="Arial"/>
-              <a:buChar char="•"/>
-            </a:pPr>
-            <a:r>
-              <a:rPr sz="1100" b="0">
-                <a:solidFill>
-                  <a:srgbClr val="262B33"/>
-                </a:solidFill>
-              </a:rPr>
-              <a:t>웹 서비스</a:t>
+              <a:t>시·군 공동영농 설명회와 농지은행 지사를 통해 첫 10개 법인을 만날 것이다</a:t>
             </a:r>
           </a:p>
         </p:txBody>
@@ -36085,34 +36048,113 @@
           <a:p>
             <a:pPr marL="0" indent="0">
               <a:spcAft>
-                <a:spcPts val="200"/>
+                <a:spcPts val="400"/>
               </a:spcAft>
               <a:buNone/>
             </a:pPr>
             <a:r>
-              <a:rPr sz="1100" b="1">
+              <a:rPr sz="1100">
                 <a:solidFill>
-                  <a:srgbClr val="262B33"/>
+                  <a:srgbClr val="1B5E7F"/>
                 </a:solidFill>
+                <a:latin typeface="Freesentation 6 SemiBold"/>
+                <a:ea typeface="Freesentation 6 SemiBold"/>
+                <a:cs typeface="Freesentation 6 SemiBold"/>
               </a:rPr>
-              <a:t>주 고객</a:t>
+              <a:t>❷ 고객군</a:t>
             </a:r>
           </a:p>
           <a:p>
             <a:pPr marL="139700" indent="-139700">
               <a:spcAft>
-                <a:spcPts val="600"/>
+                <a:spcPts val="400"/>
               </a:spcAft>
               <a:buFont typeface="Arial"/>
               <a:buChar char="•"/>
             </a:pPr>
             <a:r>
-              <a:rPr sz="1100" b="0">
+              <a:rPr sz="1100">
+                <a:solidFill>
+                  <a:srgbClr val="1B5E7F"/>
+                </a:solidFill>
+                <a:latin typeface="Freesentation 6 SemiBold"/>
+                <a:ea typeface="Freesentation 6 SemiBold"/>
+                <a:cs typeface="Freesentation 6 SemiBold"/>
+              </a:rPr>
+              <a:t>1순위 </a:t>
+            </a:r>
+            <a:r>
+              <a:rPr sz="1100">
                 <a:solidFill>
                   <a:srgbClr val="262B33"/>
                 </a:solidFill>
+                <a:latin typeface="Freesentation 4 Regular"/>
+                <a:ea typeface="Freesentation 4 Regular"/>
+                <a:cs typeface="Freesentation 4 Regular"/>
               </a:rPr>
-              <a:t>들녘 공동영농을 추진하는 농업법인 대표·사무장 (지원 기준 20ha·5명 이상)</a:t>
+              <a:t>공동영농 추진 법인 사무장·대표 (B2B)</a:t>
+            </a:r>
+          </a:p>
+          <a:p>
+            <a:pPr marL="139700" indent="-139700">
+              <a:spcAft>
+                <a:spcPts val="400"/>
+              </a:spcAft>
+              <a:buFont typeface="Arial"/>
+              <a:buChar char="•"/>
+            </a:pPr>
+            <a:r>
+              <a:rPr sz="1100">
+                <a:solidFill>
+                  <a:srgbClr val="1B5E7F"/>
+                </a:solidFill>
+                <a:latin typeface="Freesentation 6 SemiBold"/>
+                <a:ea typeface="Freesentation 6 SemiBold"/>
+                <a:cs typeface="Freesentation 6 SemiBold"/>
+              </a:rPr>
+              <a:t>2순위 </a:t>
+            </a:r>
+            <a:r>
+              <a:rPr sz="1100">
+                <a:solidFill>
+                  <a:srgbClr val="262B33"/>
+                </a:solidFill>
+                <a:latin typeface="Freesentation 4 Regular"/>
+                <a:ea typeface="Freesentation 4 Regular"/>
+                <a:cs typeface="Freesentation 4 Regular"/>
+              </a:rPr>
+              <a:t>시·군 농정부서, 농어촌공사 농지은행 (B2G)</a:t>
+            </a:r>
+          </a:p>
+          <a:p>
+            <a:pPr marL="139700" indent="-139700">
+              <a:spcAft>
+                <a:spcPts val="800"/>
+              </a:spcAft>
+              <a:buFont typeface="Arial"/>
+              <a:buChar char="•"/>
+            </a:pPr>
+            <a:r>
+              <a:rPr sz="1100">
+                <a:solidFill>
+                  <a:srgbClr val="1B5E7F"/>
+                </a:solidFill>
+                <a:latin typeface="Freesentation 6 SemiBold"/>
+                <a:ea typeface="Freesentation 6 SemiBold"/>
+                <a:cs typeface="Freesentation 6 SemiBold"/>
+              </a:rPr>
+              <a:t>3순위 </a:t>
+            </a:r>
+            <a:r>
+              <a:rPr sz="1100">
+                <a:solidFill>
+                  <a:srgbClr val="262B33"/>
+                </a:solidFill>
+                <a:latin typeface="Freesentation 4 Regular"/>
+                <a:ea typeface="Freesentation 4 Regular"/>
+                <a:cs typeface="Freesentation 4 Regular"/>
+              </a:rPr>
+              <a:t>참여를 검토 중인 농가 (간접)</a:t>
             </a:r>
           </a:p>
           <a:p>
@@ -36123,62 +36165,15 @@
               <a:buNone/>
             </a:pPr>
             <a:r>
-              <a:rPr sz="1100" b="1">
+              <a:rPr sz="1050">
                 <a:solidFill>
-                  <a:srgbClr val="262B33"/>
+                  <a:srgbClr val="6B7280"/>
                 </a:solidFill>
+                <a:latin typeface="Freesentation 4 Regular"/>
+                <a:ea typeface="Freesentation 4 Regular"/>
+                <a:cs typeface="Freesentation 4 Regular"/>
               </a:rPr>
-              <a:t>확장 고객</a:t>
-            </a:r>
-          </a:p>
-          <a:p>
-            <a:pPr marL="139700" indent="-139700">
-              <a:spcAft>
-                <a:spcPts val="600"/>
-              </a:spcAft>
-              <a:buFont typeface="Arial"/>
-              <a:buChar char="•"/>
-            </a:pPr>
-            <a:r>
-              <a:rPr sz="1100" b="0">
-                <a:solidFill>
-                  <a:srgbClr val="262B33"/>
-                </a:solidFill>
-              </a:rPr>
-              <a:t>시·군 농정부서, 농지은행 (교환·편입 중개)</a:t>
-            </a:r>
-          </a:p>
-          <a:p>
-            <a:pPr marL="0" indent="0">
-              <a:spcAft>
-                <a:spcPts val="200"/>
-              </a:spcAft>
-              <a:buNone/>
-            </a:pPr>
-            <a:r>
-              <a:rPr sz="1100" b="1">
-                <a:solidFill>
-                  <a:srgbClr val="262B33"/>
-                </a:solidFill>
-              </a:rPr>
-              <a:t>간접 사용자</a:t>
-            </a:r>
-          </a:p>
-          <a:p>
-            <a:pPr marL="139700" indent="-139700">
-              <a:spcAft>
-                <a:spcPts val="200"/>
-              </a:spcAft>
-              <a:buFont typeface="Arial"/>
-              <a:buChar char="•"/>
-            </a:pPr>
-            <a:r>
-              <a:rPr sz="1100" b="0">
-                <a:solidFill>
-                  <a:srgbClr val="262B33"/>
-                </a:solidFill>
-              </a:rPr>
-              <a:t>참여·비참여 농가 (설득 카드 수신)</a:t>
+              <a:t>구멍 때문에 지원 기준(20ha·5명)과 배당을 잃을 위험을 가장 크게 겪는 집단</a:t>
             </a:r>
           </a:p>
         </p:txBody>
@@ -36205,20 +36200,22 @@
           </a:bodyPr>
           <a:lstStyle/>
           <a:p>
-            <a:pPr marL="139700" indent="-139700">
+            <a:pPr marL="0" indent="0">
               <a:spcAft>
-                <a:spcPts val="200"/>
+                <a:spcPts val="400"/>
               </a:spcAft>
-              <a:buFont typeface="Arial"/>
-              <a:buChar char="•"/>
+              <a:buNone/>
             </a:pPr>
             <a:r>
-              <a:rPr sz="1100" b="0">
+              <a:rPr sz="1100">
                 <a:solidFill>
-                  <a:srgbClr val="262B33"/>
+                  <a:srgbClr val="1B5E7F"/>
                 </a:solidFill>
+                <a:latin typeface="Freesentation 6 SemiBold"/>
+                <a:ea typeface="Freesentation 6 SemiBold"/>
+                <a:cs typeface="Freesentation 6 SemiBold"/>
               </a:rPr>
-              <a:t>웹 서비스 개발·서버 운영</a:t>
+              <a:t>❾ 비용 구조</a:t>
             </a:r>
           </a:p>
           <a:p>
@@ -36230,12 +36227,26 @@
               <a:buChar char="•"/>
             </a:pPr>
             <a:r>
-              <a:rPr sz="1100" b="0">
+              <a:rPr sz="1100">
+                <a:solidFill>
+                  <a:srgbClr val="1B5E7F"/>
+                </a:solidFill>
+                <a:latin typeface="Freesentation 6 SemiBold"/>
+                <a:ea typeface="Freesentation 6 SemiBold"/>
+                <a:cs typeface="Freesentation 6 SemiBold"/>
+              </a:rPr>
+              <a:t>고정  </a:t>
+            </a:r>
+            <a:r>
+              <a:rPr sz="1100">
                 <a:solidFill>
                   <a:srgbClr val="262B33"/>
                 </a:solidFill>
+                <a:latin typeface="Freesentation 4 Regular"/>
+                <a:ea typeface="Freesentation 4 Regular"/>
+                <a:cs typeface="Freesentation 4 Regular"/>
               </a:rPr>
-              <a:t>공공 API 연동·데이터 정비</a:t>
+              <a:t>웹 서비스 개발·서버, 공공 데이터 연동·정비</a:t>
             </a:r>
           </a:p>
           <a:p>
@@ -36247,29 +36258,26 @@
               <a:buChar char="•"/>
             </a:pPr>
             <a:r>
-              <a:rPr sz="1100" b="0">
+              <a:rPr sz="1100">
+                <a:solidFill>
+                  <a:srgbClr val="1B5E7F"/>
+                </a:solidFill>
+                <a:latin typeface="Freesentation 6 SemiBold"/>
+                <a:ea typeface="Freesentation 6 SemiBold"/>
+                <a:cs typeface="Freesentation 6 SemiBold"/>
+              </a:rPr>
+              <a:t>변동  </a:t>
+            </a:r>
+            <a:r>
+              <a:rPr sz="1100">
                 <a:solidFill>
                   <a:srgbClr val="262B33"/>
                 </a:solidFill>
+                <a:latin typeface="Freesentation 4 Regular"/>
+                <a:ea typeface="Freesentation 4 Regular"/>
+                <a:cs typeface="Freesentation 4 Regular"/>
               </a:rPr>
-              <a:t>들녘별 현장 보정 (소득·기계비·임차료 자료 수집)</a:t>
-            </a:r>
-          </a:p>
-          <a:p>
-            <a:pPr marL="139700" indent="-139700">
-              <a:spcAft>
-                <a:spcPts val="200"/>
-              </a:spcAft>
-              <a:buFont typeface="Arial"/>
-              <a:buChar char="•"/>
-            </a:pPr>
-            <a:r>
-              <a:rPr sz="1100" b="0">
-                <a:solidFill>
-                  <a:srgbClr val="262B33"/>
-                </a:solidFill>
-              </a:rPr>
-              <a:t>영업·교육</a:t>
+              <a:t>들녘별 현장 보정(소득·기계비 자료 수집), 영업·교육</a:t>
             </a:r>
           </a:p>
         </p:txBody>
@@ -36296,20 +36304,22 @@
           </a:bodyPr>
           <a:lstStyle/>
           <a:p>
-            <a:pPr marL="139700" indent="-139700">
+            <a:pPr marL="0" indent="0">
               <a:spcAft>
-                <a:spcPts val="200"/>
+                <a:spcPts val="400"/>
               </a:spcAft>
-              <a:buFont typeface="Arial"/>
-              <a:buChar char="•"/>
+              <a:buNone/>
             </a:pPr>
             <a:r>
-              <a:rPr sz="1100" b="0">
+              <a:rPr sz="1100">
                 <a:solidFill>
-                  <a:srgbClr val="262B33"/>
+                  <a:srgbClr val="1B5E7F"/>
                 </a:solidFill>
+                <a:latin typeface="Freesentation 6 SemiBold"/>
+                <a:ea typeface="Freesentation 6 SemiBold"/>
+                <a:cs typeface="Freesentation 6 SemiBold"/>
               </a:rPr>
-              <a:t>법인 구독: 단지(들녘) 1곳당 연 단위 요금 (가설)</a:t>
+              <a:t>❺ 수익 흐름</a:t>
             </a:r>
           </a:p>
           <a:p>
@@ -36321,12 +36331,15 @@
               <a:buChar char="•"/>
             </a:pPr>
             <a:r>
-              <a:rPr sz="1100" b="0">
+              <a:rPr sz="1100">
                 <a:solidFill>
                   <a:srgbClr val="262B33"/>
                 </a:solidFill>
+                <a:latin typeface="Freesentation 4 Regular"/>
+                <a:ea typeface="Freesentation 4 Regular"/>
+                <a:cs typeface="Freesentation 4 Regular"/>
               </a:rPr>
-              <a:t>지자체·농어촌공사 시범사업 용역 (B2G)</a:t>
+              <a:t>법인은 단지 1곳당 연 구독료를, 지자체는 시범사업 용역비를 낼 것이다</a:t>
             </a:r>
           </a:p>
           <a:p>
@@ -36338,12 +36351,15 @@
               <a:buChar char="•"/>
             </a:pPr>
             <a:r>
-              <a:rPr sz="1100" b="0">
+              <a:rPr sz="1100">
                 <a:solidFill>
-                  <a:srgbClr val="262B33"/>
+                  <a:srgbClr val="6B7280"/>
                 </a:solidFill>
+                <a:latin typeface="Freesentation 4 Regular"/>
+                <a:ea typeface="Freesentation 4 Regular"/>
+                <a:cs typeface="Freesentation 4 Regular"/>
               </a:rPr>
-              <a:t>정산·배분 리포트 건별 발행 (가설)</a:t>
+              <a:t>금액은 "지난해 사업계획·필지 정리에 쓴 외부 비용" 인터뷰로 검증한다</a:t>
             </a:r>
           </a:p>
         </p:txBody>
@@ -36928,19 +36944,18 @@
                         <a:spcAft>
                           <a:spcPts val="200"/>
                         </a:spcAft>
-                        <a:buClr>
-                          <a:schemeClr val="dk1"/>
-                        </a:buClr>
-                        <a:buSzPts val="1600"/>
                         <a:buNone/>
                       </a:pPr>
                       <a:r>
-                        <a:rPr sz="1400" b="0">
+                        <a:rPr sz="1500">
                           <a:solidFill>
                             <a:srgbClr val="262B33"/>
                           </a:solidFill>
+                          <a:latin typeface="Freesentation 4 Regular"/>
+                          <a:ea typeface="Freesentation 4 Regular"/>
+                          <a:cs typeface="Freesentation 4 Regular"/>
                         </a:rPr>
-                        <a:t>거절 필지를 클릭하면 면적·농가 수·연결성 기준 충족 여부와 평당 배당 변화를 1초 안에 보여 준다</a:t>
+                        <a:t>거절 필지가 지원 기준과 평당 배당에 주는 영향을 1초 안에 판정해, 대안을 정하는 기간을 2주에서 1일로 줄일 것이다</a:t>
                       </a:r>
                       <a:endParaRPr sz="1600">
                         <a:solidFill>
@@ -37010,19 +37025,18 @@
                         <a:spcAft>
                           <a:spcPts val="200"/>
                         </a:spcAft>
-                        <a:buClr>
-                          <a:schemeClr val="dk1"/>
-                        </a:buClr>
-                        <a:buSzPts val="1600"/>
                         <a:buNone/>
                       </a:pPr>
                       <a:r>
-                        <a:rPr sz="1400" b="0">
+                        <a:rPr sz="1500">
                           <a:solidFill>
                             <a:srgbClr val="262B33"/>
                           </a:solidFill>
+                          <a:latin typeface="Freesentation 5 Medium"/>
+                          <a:ea typeface="Freesentation 5 Medium"/>
+                          <a:cs typeface="Freesentation 5 Medium"/>
                         </a:rPr>
-                        <a:t>공동영농 법인 대표·사무장 (참여 농가 설득 단계)</a:t>
+                        <a:t>공동영농을 추진하는 농업법인 대표·사무장</a:t>
                       </a:r>
                       <a:endParaRPr sz="1600">
                         <a:solidFill>
@@ -37033,6 +37047,31 @@
                         <a:cs typeface="Arial"/>
                         <a:sym typeface="Arial"/>
                       </a:endParaRPr>
+                    </a:p>
+                    <a:p>
+                      <a:pPr indent="0" lvl="0" marL="0" marR="0" rtl="0" algn="ctr">
+                        <a:lnSpc>
+                          <a:spcPct val="100000"/>
+                        </a:lnSpc>
+                        <a:spcBef>
+                          <a:spcPts val="0"/>
+                        </a:spcBef>
+                        <a:spcAft>
+                          <a:spcPts val="200"/>
+                        </a:spcAft>
+                        <a:buNone/>
+                      </a:pPr>
+                      <a:r>
+                        <a:rPr sz="1200">
+                          <a:solidFill>
+                            <a:srgbClr val="1B5E7F"/>
+                          </a:solidFill>
+                          <a:latin typeface="Freesentation 6 SemiBold"/>
+                          <a:ea typeface="Freesentation 6 SemiBold"/>
+                          <a:cs typeface="Freesentation 6 SemiBold"/>
+                        </a:rPr>
+                        <a:t>B2B · 1순위</a:t>
+                      </a:r>
                     </a:p>
                   </a:txBody>
                   <a:tcPr marT="45725" marB="45725" marR="91450" marL="91450" anchor="ctr">
@@ -37172,19 +37211,18 @@
                         <a:spcAft>
                           <a:spcPts val="200"/>
                         </a:spcAft>
-                        <a:buClr>
-                          <a:schemeClr val="dk1"/>
-                        </a:buClr>
-                        <a:buSzPts val="1600"/>
                         <a:buNone/>
                       </a:pPr>
                       <a:r>
-                        <a:rPr sz="1400" b="0">
+                        <a:rPr sz="1500">
                           <a:solidFill>
                             <a:srgbClr val="262B33"/>
                           </a:solidFill>
+                          <a:latin typeface="Freesentation 4 Regular"/>
+                          <a:ea typeface="Freesentation 4 Regular"/>
+                          <a:cs typeface="Freesentation 4 Regular"/>
                         </a:rPr>
-                        <a:t>기준을 지키면서 평당 배당이 가장 높은 대안(땅 추가·경작권 교환·경로 재최적화)을 최적 1 + 예비 2로 추천한다</a:t>
+                        <a:t>기준을 지키면서 배당이 가장 높은 대체 필지·경작권 교환 후보를 보여 줘, 교환·편입 중개 시간을 줄일 것이다</a:t>
                       </a:r>
                       <a:endParaRPr sz="1600">
                         <a:solidFill>
@@ -37254,19 +37292,18 @@
                         <a:spcAft>
                           <a:spcPts val="200"/>
                         </a:spcAft>
-                        <a:buClr>
-                          <a:schemeClr val="dk1"/>
-                        </a:buClr>
-                        <a:buSzPts val="1600"/>
                         <a:buNone/>
                       </a:pPr>
                       <a:r>
-                        <a:rPr sz="1400" b="0">
+                        <a:rPr sz="1500">
                           <a:solidFill>
                             <a:srgbClr val="262B33"/>
                           </a:solidFill>
+                          <a:latin typeface="Freesentation 5 Medium"/>
+                          <a:ea typeface="Freesentation 5 Medium"/>
+                          <a:cs typeface="Freesentation 5 Medium"/>
                         </a:rPr>
-                        <a:t>공동영농 법인, 교환·편입을 중개하는 농지은행·시군 농정부서</a:t>
+                        <a:t>시·군 농정부서, 농어촌공사 농지은행</a:t>
                       </a:r>
                       <a:endParaRPr sz="1600">
                         <a:solidFill>
@@ -37277,6 +37314,31 @@
                         <a:cs typeface="Arial"/>
                         <a:sym typeface="Arial"/>
                       </a:endParaRPr>
+                    </a:p>
+                    <a:p>
+                      <a:pPr indent="0" lvl="0" marL="0" marR="0" rtl="0" algn="ctr">
+                        <a:lnSpc>
+                          <a:spcPct val="100000"/>
+                        </a:lnSpc>
+                        <a:spcBef>
+                          <a:spcPts val="0"/>
+                        </a:spcBef>
+                        <a:spcAft>
+                          <a:spcPts val="200"/>
+                        </a:spcAft>
+                        <a:buNone/>
+                      </a:pPr>
+                      <a:r>
+                        <a:rPr sz="1200">
+                          <a:solidFill>
+                            <a:srgbClr val="1B5E7F"/>
+                          </a:solidFill>
+                          <a:latin typeface="Freesentation 6 SemiBold"/>
+                          <a:ea typeface="Freesentation 6 SemiBold"/>
+                          <a:cs typeface="Freesentation 6 SemiBold"/>
+                        </a:rPr>
+                        <a:t>B2G · 2순위</a:t>
+                      </a:r>
                     </a:p>
                   </a:txBody>
                   <a:tcPr marT="45725" marB="45725" marR="91450" marL="91450" anchor="ctr">
@@ -37416,19 +37478,18 @@
                         <a:spcAft>
                           <a:spcPts val="200"/>
                         </a:spcAft>
-                        <a:buClr>
-                          <a:schemeClr val="dk1"/>
-                        </a:buClr>
-                        <a:buSzPts val="1600"/>
                         <a:buNone/>
                       </a:pPr>
                       <a:r>
-                        <a:rPr sz="1400" b="0">
+                        <a:rPr sz="1500">
                           <a:solidFill>
                             <a:srgbClr val="262B33"/>
                           </a:solidFill>
+                          <a:latin typeface="Freesentation 4 Regular"/>
+                          <a:ea typeface="Freesentation 4 Regular"/>
+                          <a:cs typeface="Freesentation 4 Regular"/>
                         </a:rPr>
-                        <a:t>평당 배당을 범위로 보여 주고 흉년(−20%·−30%) 때 배당형·고정 임차료형 차이를 비교해 설득 근거를 준다</a:t>
+                        <a:t>평당 배당을 범위로, 흉년 때 금액까지 보여 줘 참여 결정의 불안을 줄일 것이다</a:t>
                       </a:r>
                       <a:endParaRPr sz="1600">
                         <a:solidFill>
@@ -37501,12 +37562,15 @@
                         <a:buNone/>
                       </a:pPr>
                       <a:r>
-                        <a:rPr sz="1400" b="0">
+                        <a:rPr sz="1500">
                           <a:solidFill>
                             <a:srgbClr val="262B33"/>
                           </a:solidFill>
+                          <a:latin typeface="Freesentation 5 Medium"/>
+                          <a:ea typeface="Freesentation 5 Medium"/>
+                          <a:cs typeface="Freesentation 5 Medium"/>
                         </a:rPr>
-                        <a:t>참여·비참여 농가 (설득 대상)</a:t>
+                        <a:t>참여를 검토 중인 농가 (설득 대상)</a:t>
                       </a:r>
                       <a:endParaRPr sz="1600">
                         <a:solidFill>
@@ -37517,6 +37581,31 @@
                         <a:cs typeface="Arial"/>
                         <a:sym typeface="Arial"/>
                       </a:endParaRPr>
+                    </a:p>
+                    <a:p>
+                      <a:pPr indent="0" lvl="0" marL="0" marR="0" rtl="0" algn="ctr">
+                        <a:lnSpc>
+                          <a:spcPct val="100000"/>
+                        </a:lnSpc>
+                        <a:spcBef>
+                          <a:spcPts val="0"/>
+                        </a:spcBef>
+                        <a:spcAft>
+                          <a:spcPts val="200"/>
+                        </a:spcAft>
+                        <a:buNone/>
+                      </a:pPr>
+                      <a:r>
+                        <a:rPr sz="1200">
+                          <a:solidFill>
+                            <a:srgbClr val="1B5E7F"/>
+                          </a:solidFill>
+                          <a:latin typeface="Freesentation 6 SemiBold"/>
+                          <a:ea typeface="Freesentation 6 SemiBold"/>
+                          <a:cs typeface="Freesentation 6 SemiBold"/>
+                        </a:rPr>
+                        <a:t>B2C · 간접 · 3순위</a:t>
+                      </a:r>
                     </a:p>
                   </a:txBody>
                   <a:tcPr marT="45725" marB="45725" marR="91450" marL="91450" anchor="ctr">
@@ -37636,12 +37725,15 @@
                 <a:t>         아이템 명 :</a:t>
               </a:r>
               <a:r>
-                <a:rPr b="1" sz="1600">
+                <a:rPr sz="1600">
                   <a:solidFill>
                     <a:srgbClr val="262B33"/>
                   </a:solidFill>
+                  <a:latin typeface="Freesentation 6 SemiBold"/>
+                  <a:ea typeface="Freesentation 6 SemiBold"/>
+                  <a:cs typeface="Freesentation 6 SemiBold"/>
                 </a:rPr>
-                <a:t> 빈 필드 시뮬레이터 — 공동영농 거절 필지 대응 의사결정 도구</a:t>
+                <a:t> 빈 필드 시뮬레이터 (Empty Field Simulator) — 공동영농 거절 필지 대응 도구</a:t>
               </a:r>
               <a:endParaRPr/>
             </a:p>
@@ -38337,19 +38429,18 @@
                   <a:spcAft>
                     <a:spcPts val="200"/>
                   </a:spcAft>
-                  <a:buClr>
-                    <a:schemeClr val="lt1"/>
-                  </a:buClr>
-                  <a:buSzPts val="1100"/>
                   <a:buNone/>
                 </a:pPr>
                 <a:r>
-                  <a:rPr sz="1200" b="0">
+                  <a:rPr sz="1200">
                     <a:solidFill>
                       <a:srgbClr val="262B33"/>
                     </a:solidFill>
+                    <a:latin typeface="Freesentation 4 Regular"/>
+                    <a:ea typeface="Freesentation 4 Regular"/>
+                    <a:cs typeface="Freesentation 4 Regular"/>
                   </a:rPr>
-                  <a:t>공동영농 추진 중인 농업법인 대표·사무장 (설득 단계)</a:t>
+                  <a:t>공동영농 추진 중인 농업법인 사무장·대표 (B2B)</a:t>
                 </a:r>
                 <a:endParaRPr b="0" i="0" sz="1100" u="none" cap="none" strike="noStrike">
                   <a:solidFill>
@@ -38489,19 +38580,18 @@
                   <a:spcAft>
                     <a:spcPts val="200"/>
                   </a:spcAft>
-                  <a:buClr>
-                    <a:schemeClr val="lt1"/>
-                  </a:buClr>
-                  <a:buSzPts val="1100"/>
                   <a:buNone/>
                 </a:pPr>
                 <a:r>
-                  <a:rPr sz="1200" b="0">
+                  <a:rPr sz="1200">
                     <a:solidFill>
                       <a:srgbClr val="262B33"/>
                     </a:solidFill>
+                    <a:latin typeface="Freesentation 4 Regular"/>
+                    <a:ea typeface="Freesentation 4 Regular"/>
+                    <a:cs typeface="Freesentation 4 Regular"/>
                   </a:rPr>
-                  <a:t>거절 필지 하나가 지원 기준과 평당 배당에 주는 영향을 즉시 계산하고, 기준을 지키는 최적 대안 1 + 예비 2를 제시한다</a:t>
+                  <a:t>거절 필지 하나가 지원 기준과 평당 배당에 주는 영향을 1초 안에 판정하고, 기준을 지키는 대안을 최적 1 + 예비 2로 제시한다</a:t>
                 </a:r>
                 <a:endParaRPr b="0" i="0" sz="1100" u="none" cap="none" strike="noStrike">
                   <a:solidFill>
@@ -38967,12 +39057,15 @@
                         <a:buNone/>
                       </a:pPr>
                       <a:r>
-                        <a:rPr sz="1050" b="0">
+                        <a:rPr sz="1050">
                           <a:solidFill>
                             <a:srgbClr val="262B33"/>
                           </a:solidFill>
+                          <a:latin typeface="Freesentation 4 Regular"/>
+                          <a:ea typeface="Freesentation 4 Regular"/>
+                          <a:cs typeface="Freesentation 4 Regular"/>
                         </a:rPr>
-                        <a:t>공동영농 법인은 설득 과정에서 일부 농가의 거절을 반드시 겪고, 대안은 대표·사무장이 직접 판단한다</a:t>
+                        <a:t>공동영농을 추진하는 법인 사무장은 최근 1년 안에 참여 거절 때문에 단지를 다시 설계한 적이 있을 것이다</a:t>
                       </a:r>
                       <a:endParaRPr/>
                     </a:p>
@@ -39031,12 +39124,15 @@
                         <a:buNone/>
                       </a:pPr>
                       <a:r>
-                        <a:rPr sz="1050" b="0">
+                        <a:rPr sz="1050">
                           <a:solidFill>
                             <a:srgbClr val="262B33"/>
                           </a:solidFill>
+                          <a:latin typeface="Freesentation 4 Regular"/>
+                          <a:ea typeface="Freesentation 4 Regular"/>
+                          <a:cs typeface="Freesentation 4 Regular"/>
                         </a:rPr>
-                        <a:t>설득 과정에서 거절한 농가가 있었나요? 몇 곳, 어느 위치였나요? 그때 누가 어떻게 대안을 정했나요?</a:t>
+                        <a:t>최근 1년 동안 참여를 거절한 농가가 몇 곳이었나요? 마지막 거절은 언제, 어느 필지였나요?</a:t>
                       </a:r>
                       <a:endParaRPr/>
                     </a:p>
@@ -39092,17 +39188,16 @@
                         <a:spcAft>
                           <a:spcPts val="200"/>
                         </a:spcAft>
-                        <a:buClr>
-                          <a:schemeClr val="dk1"/>
-                        </a:buClr>
-                        <a:buSzPts val="1300"/>
                         <a:buNone/>
                       </a:pPr>
                       <a:r>
-                        <a:rPr sz="1050" b="0">
+                        <a:rPr sz="1050">
                           <a:solidFill>
                             <a:srgbClr val="6B7280"/>
                           </a:solidFill>
+                          <a:latin typeface="Freesentation 4 Regular"/>
+                          <a:ea typeface="Freesentation 4 Regular"/>
+                          <a:cs typeface="Freesentation 4 Regular"/>
                         </a:rPr>
                         <a:t>(인터뷰 후 기입)</a:t>
                       </a:r>
@@ -39261,12 +39356,15 @@
                         <a:buNone/>
                       </a:pPr>
                       <a:r>
-                        <a:rPr sz="1050" b="0">
+                        <a:rPr sz="1050">
                           <a:solidFill>
                             <a:srgbClr val="262B33"/>
                           </a:solidFill>
+                          <a:latin typeface="Freesentation 4 Regular"/>
+                          <a:ea typeface="Freesentation 4 Regular"/>
+                          <a:cs typeface="Freesentation 4 Regular"/>
                         </a:rPr>
-                        <a:t>구멍이 생기면 법인은 면적 기준 충족 여부와 평당 배당이 얼마나 줄지 몰라, 대체 땅을 감으로 찾는다</a:t>
+                        <a:t>거절이 나오면 기준 재확인과 대체 땅 찾기에 2주 이상 걸리고, 남은 농가에게 배당 변화를 설명하지 못할 것이다</a:t>
                       </a:r>
                       <a:endParaRPr/>
                     </a:p>
@@ -39325,12 +39423,15 @@
                         <a:buNone/>
                       </a:pPr>
                       <a:r>
-                        <a:rPr sz="1050" b="0">
+                        <a:rPr sz="1050">
                           <a:solidFill>
                             <a:srgbClr val="262B33"/>
                           </a:solidFill>
+                          <a:latin typeface="Freesentation 4 Regular"/>
+                          <a:ea typeface="Freesentation 4 Regular"/>
+                          <a:cs typeface="Freesentation 4 Regular"/>
                         </a:rPr>
-                        <a:t>거절로 빠진 땅 때문에 수익·작업비가 얼마나 달라지는지 계산해 봤나요? 지원 면적 기준이 걱정된 적이 있나요?</a:t>
+                        <a:t>마지막 거절 뒤 무엇부터 하셨나요? 대체 땅을 정하기까지 며칠, 몇 번 답사하셨나요? 남은 농가가 무엇을 물었나요?</a:t>
                       </a:r>
                       <a:endParaRPr/>
                     </a:p>
@@ -39389,17 +39490,16 @@
                         <a:spcAft>
                           <a:spcPts val="200"/>
                         </a:spcAft>
-                        <a:buClr>
-                          <a:schemeClr val="dk1"/>
-                        </a:buClr>
-                        <a:buSzPts val="1300"/>
                         <a:buNone/>
                       </a:pPr>
                       <a:r>
-                        <a:rPr sz="1050" b="0">
+                        <a:rPr sz="1050">
                           <a:solidFill>
                             <a:srgbClr val="6B7280"/>
                           </a:solidFill>
+                          <a:latin typeface="Freesentation 4 Regular"/>
+                          <a:ea typeface="Freesentation 4 Regular"/>
+                          <a:cs typeface="Freesentation 4 Regular"/>
                         </a:rPr>
                         <a:t>(인터뷰 후 기입)</a:t>
                       </a:r>
@@ -39550,12 +39650,15 @@
                         <a:buNone/>
                       </a:pPr>
                       <a:r>
-                        <a:rPr sz="1050" b="0">
+                        <a:rPr sz="1050">
                           <a:solidFill>
                             <a:srgbClr val="262B33"/>
                           </a:solidFill>
+                          <a:latin typeface="Freesentation 4 Regular"/>
+                          <a:ea typeface="Freesentation 4 Regular"/>
+                          <a:cs typeface="Freesentation 4 Regular"/>
                         </a:rPr>
-                        <a:t>거절 필지를 클릭하면 기준 판정·대체 후보 순위·평당 배당 범위가 나오는 화면이 있으면 대안 결정과 설득이 빨라진다</a:t>
+                        <a:t>거절 필지를 누르면 기준 판정·대체 후보·평당 배당 범위가 나오면, 대안 결정이 1일 안에 끝날 것이다</a:t>
                       </a:r>
                       <a:endParaRPr/>
                     </a:p>
@@ -39614,12 +39717,15 @@
                         <a:buNone/>
                       </a:pPr>
                       <a:r>
-                        <a:rPr sz="1050" b="0">
+                        <a:rPr sz="1050">
                           <a:solidFill>
                             <a:srgbClr val="262B33"/>
                           </a:solidFill>
+                          <a:latin typeface="Freesentation 4 Regular"/>
+                          <a:ea typeface="Freesentation 4 Regular"/>
+                          <a:cs typeface="Freesentation 4 Regular"/>
                         </a:rPr>
-                        <a:t>이 화면을 보면 어떤 대안을 고르겠어요? 설득할 때 평당 배당 범위와 흉년 금액 중 무엇이 더 설득력 있나요?</a:t>
+                        <a:t>(문제 확인 뒤) 지난 거절 사례를 이 화면에 넣어 보면, 그때 실제로 고른 땅과 무엇이 같고 다른가요?</a:t>
                       </a:r>
                       <a:endParaRPr/>
                     </a:p>
@@ -39678,17 +39784,16 @@
                         <a:spcAft>
                           <a:spcPts val="200"/>
                         </a:spcAft>
-                        <a:buClr>
-                          <a:schemeClr val="dk1"/>
-                        </a:buClr>
-                        <a:buSzPts val="1300"/>
                         <a:buNone/>
                       </a:pPr>
                       <a:r>
-                        <a:rPr sz="1050" b="0">
+                        <a:rPr sz="1050">
                           <a:solidFill>
                             <a:srgbClr val="6B7280"/>
                           </a:solidFill>
+                          <a:latin typeface="Freesentation 4 Regular"/>
+                          <a:ea typeface="Freesentation 4 Regular"/>
+                          <a:cs typeface="Freesentation 4 Regular"/>
                         </a:rPr>
                         <a:t>(인터뷰 후 기입)</a:t>
                       </a:r>
@@ -39882,12 +39987,15 @@
                         <a:buNone/>
                       </a:pPr>
                       <a:r>
-                        <a:rPr sz="1050" b="0">
+                        <a:rPr sz="1050">
                           <a:solidFill>
                             <a:srgbClr val="262B33"/>
                           </a:solidFill>
+                          <a:latin typeface="Freesentation 4 Regular"/>
+                          <a:ea typeface="Freesentation 4 Regular"/>
+                          <a:cs typeface="Freesentation 4 Regular"/>
                         </a:rPr>
-                        <a:t>법인 사무장은 거절 필지 때문에 기준·배당이 어떻게 바뀌는지 몰라 설득이 막히고, 시뮬레이터가 있으면 결정·설득 기간이 준다</a:t>
+                        <a:t>사무장은 거절로 생긴 구멍 때문에 지원 자격과 배당 설명이 막히고, 시뮬레이터로 재설계 기간이 2주에서 1일로 줄 것이다</a:t>
                       </a:r>
                       <a:endParaRPr/>
                     </a:p>
@@ -39946,12 +40054,15 @@
                         <a:buNone/>
                       </a:pPr>
                       <a:r>
-                        <a:rPr sz="1050" b="0">
+                        <a:rPr sz="1050">
                           <a:solidFill>
                             <a:srgbClr val="262B33"/>
                           </a:solidFill>
+                          <a:latin typeface="Freesentation 4 Regular"/>
+                          <a:ea typeface="Freesentation 4 Regular"/>
+                          <a:cs typeface="Freesentation 4 Regular"/>
                         </a:rPr>
-                        <a:t>이 도구를 쓰시겠어요? 단지 1곳당 얼마까지 낼 의향이 있나요? 결제는 법인과 지자체 중 누가 하나요?</a:t>
+                        <a:t>지난해 사업계획·필지 정리를 어디에 맡겼고 비용은 얼마였나요? 그 비용은 누가 결재했나요?</a:t>
                       </a:r>
                       <a:endParaRPr/>
                     </a:p>
@@ -40010,17 +40121,16 @@
                         <a:spcAft>
                           <a:spcPts val="200"/>
                         </a:spcAft>
-                        <a:buClr>
-                          <a:schemeClr val="dk1"/>
-                        </a:buClr>
-                        <a:buSzPts val="1300"/>
                         <a:buNone/>
                       </a:pPr>
                       <a:r>
-                        <a:rPr sz="1050" b="0">
+                        <a:rPr sz="1050">
                           <a:solidFill>
                             <a:srgbClr val="6B7280"/>
                           </a:solidFill>
+                          <a:latin typeface="Freesentation 4 Regular"/>
+                          <a:ea typeface="Freesentation 4 Regular"/>
+                          <a:cs typeface="Freesentation 4 Regular"/>
                         </a:rPr>
                         <a:t>(인터뷰 후 기입)</a:t>
                       </a:r>
@@ -40692,474 +40802,6 @@
   <p:cSld>
     <p:spTree>
       <p:nvGrpSpPr>
-        <p:cNvPr id="346" name="Shape 346"/>
-        <p:cNvGrpSpPr/>
-        <p:nvPr/>
-      </p:nvGrpSpPr>
-      <p:grpSpPr>
-        <a:xfrm>
-          <a:off x="0" y="0"/>
-          <a:ext cx="0" cy="0"/>
-          <a:chOff x="0" y="0"/>
-          <a:chExt cx="0" cy="0"/>
-        </a:xfrm>
-      </p:grpSpPr>
-      <p:sp>
-        <p:nvSpPr>
-          <p:cNvPr id="347" name="Google Shape;347;p3"/>
-          <p:cNvSpPr txBox="1"/>
-          <p:nvPr/>
-        </p:nvSpPr>
-        <p:spPr>
-          <a:xfrm>
-            <a:off x="501649" y="350244"/>
-            <a:ext cx="11155680" cy="461665"/>
-          </a:xfrm>
-          <a:prstGeom prst="rect">
-            <a:avLst/>
-          </a:prstGeom>
-          <a:noFill/>
-          <a:ln>
-            <a:noFill/>
-          </a:ln>
-        </p:spPr>
-        <p:txBody>
-          <a:bodyPr anchorCtr="0" anchor="t" bIns="45700" lIns="91425" spcFirstLastPara="1" rIns="91425" wrap="square" tIns="45700">
-            <a:spAutoFit/>
-          </a:bodyPr>
-          <a:lstStyle/>
-          <a:p>
-            <a:pPr indent="0" lvl="0" marL="0" marR="0" rtl="0" algn="l">
-              <a:lnSpc>
-                <a:spcPct val="100000"/>
-              </a:lnSpc>
-              <a:spcBef>
-                <a:spcPts val="0"/>
-              </a:spcBef>
-              <a:spcAft>
-                <a:spcPts val="200"/>
-              </a:spcAft>
-              <a:buClr>
-                <a:srgbClr val="262626"/>
-              </a:buClr>
-              <a:buSzPts val="2400"/>
-              <a:buNone/>
-            </a:pPr>
-            <a:r>
-              <a:rPr sz="2400" b="0">
-                <a:solidFill>
-                  <a:srgbClr val="262B33"/>
-                </a:solidFill>
-              </a:rPr>
-              <a:t>MVP — 빈 필드 시뮬레이터의 흐름과 기능 3가지</a:t>
-            </a:r>
-            <a:endParaRPr/>
-          </a:p>
-        </p:txBody>
-      </p:sp>
-      <p:pic>
-        <p:nvPicPr>
-          <p:cNvPr id="348" name="MVP 흐름도" descr="flow.png"/>
-          <p:cNvPicPr>
-            <a:picLocks noChangeAspect="1"/>
-          </p:cNvPicPr>
-          <p:nvPr/>
-        </p:nvPicPr>
-        <p:blipFill>
-          <a:blip r:embed="rId2"/>
-          <a:stretch>
-            <a:fillRect/>
-          </a:stretch>
-        </p:blipFill>
-        <p:spPr>
-          <a:xfrm>
-            <a:off x="502920" y="1005840"/>
-            <a:ext cx="6335538" cy="5486400"/>
-          </a:xfrm>
-          <a:prstGeom prst="rect">
-            <a:avLst/>
-          </a:prstGeom>
-        </p:spPr>
-      </p:pic>
-      <p:sp>
-        <p:nvSpPr>
-          <p:cNvPr id="349" name="MVP 카드 1"/>
-          <p:cNvSpPr/>
-          <p:nvPr/>
-        </p:nvSpPr>
-        <p:spPr>
-          <a:xfrm>
-            <a:off x="7086600" y="1005840"/>
-            <a:ext cx="4617720" cy="1691640"/>
-          </a:xfrm>
-          <a:prstGeom prst="roundRect">
-            <a:avLst>
-              <a:gd name="adj" fmla="val 6000"/>
-            </a:avLst>
-          </a:prstGeom>
-          <a:solidFill>
-            <a:srgbClr val="EEF3F7"/>
-          </a:solidFill>
-          <a:ln>
-            <a:noFill/>
-          </a:ln>
-          <a:effectLst/>
-        </p:spPr>
-        <p:style>
-          <a:lnRef idx="1">
-            <a:schemeClr val="accent1"/>
-          </a:lnRef>
-          <a:fillRef idx="3">
-            <a:schemeClr val="accent1"/>
-          </a:fillRef>
-          <a:effectRef idx="2">
-            <a:schemeClr val="accent1"/>
-          </a:effectRef>
-          <a:fontRef idx="minor">
-            <a:schemeClr val="lt1"/>
-          </a:fontRef>
-        </p:style>
-        <p:txBody>
-          <a:bodyPr rtlCol="0" anchor="t" wrap="square" lIns="182880" rIns="182880" tIns="137160"/>
-          <a:lstStyle/>
-          <a:p>
-            <a:pPr algn="l" marL="0" indent="0">
-              <a:spcAft>
-                <a:spcPts val="400"/>
-              </a:spcAft>
-              <a:buNone/>
-            </a:pPr>
-            <a:r>
-              <a:rPr sz="1500" b="1">
-                <a:solidFill>
-                  <a:srgbClr val="1B5E7F"/>
-                </a:solidFill>
-              </a:rPr>
-              <a:t>MVP 1 · 대체 후보 추천</a:t>
-            </a:r>
-          </a:p>
-          <a:p>
-            <a:pPr algn="l" marL="0" indent="0">
-              <a:spcAft>
-                <a:spcPts val="200"/>
-              </a:spcAft>
-              <a:buNone/>
-            </a:pPr>
-            <a:r>
-              <a:rPr sz="1200" b="0">
-                <a:solidFill>
-                  <a:srgbClr val="262B33"/>
-                </a:solidFill>
-              </a:rPr>
-              <a:t>거절 필지를 클릭해 해제하면, 지원 기준을 넘기면서 평당 배당이 가장 높은 대안을 최적 1 + 예비 2로 보여 준다. 땅 추가, 경작권 교환, 둘의 조합을 함께 비교한다.</a:t>
-            </a:r>
-          </a:p>
-        </p:txBody>
-      </p:sp>
-      <p:sp>
-        <p:nvSpPr>
-          <p:cNvPr id="350" name="MVP 카드 2"/>
-          <p:cNvSpPr/>
-          <p:nvPr/>
-        </p:nvSpPr>
-        <p:spPr>
-          <a:xfrm>
-            <a:off x="7086600" y="2880360"/>
-            <a:ext cx="4617720" cy="1691640"/>
-          </a:xfrm>
-          <a:prstGeom prst="roundRect">
-            <a:avLst>
-              <a:gd name="adj" fmla="val 6000"/>
-            </a:avLst>
-          </a:prstGeom>
-          <a:solidFill>
-            <a:srgbClr val="EEF3F7"/>
-          </a:solidFill>
-          <a:ln>
-            <a:noFill/>
-          </a:ln>
-          <a:effectLst/>
-        </p:spPr>
-        <p:style>
-          <a:lnRef idx="1">
-            <a:schemeClr val="accent1"/>
-          </a:lnRef>
-          <a:fillRef idx="3">
-            <a:schemeClr val="accent1"/>
-          </a:fillRef>
-          <a:effectRef idx="2">
-            <a:schemeClr val="accent1"/>
-          </a:effectRef>
-          <a:fontRef idx="minor">
-            <a:schemeClr val="lt1"/>
-          </a:fontRef>
-        </p:style>
-        <p:txBody>
-          <a:bodyPr rtlCol="0" anchor="t" wrap="square" lIns="182880" rIns="182880" tIns="137160"/>
-          <a:lstStyle/>
-          <a:p>
-            <a:pPr algn="l" marL="0" indent="0">
-              <a:spcAft>
-                <a:spcPts val="400"/>
-              </a:spcAft>
-              <a:buNone/>
-            </a:pPr>
-            <a:r>
-              <a:rPr sz="1500" b="1">
-                <a:solidFill>
-                  <a:srgbClr val="1B5E7F"/>
-                </a:solidFill>
-              </a:rPr>
-              <a:t>MVP 2 · 기계비와 트랙터 경로</a:t>
-            </a:r>
-          </a:p>
-          <a:p>
-            <a:pPr algn="l" marL="0" indent="0">
-              <a:spcAft>
-                <a:spcPts val="200"/>
-              </a:spcAft>
-              <a:buNone/>
-            </a:pPr>
-            <a:r>
-              <a:rPr sz="1200" b="0">
-                <a:solidFill>
-                  <a:srgbClr val="262B33"/>
-                </a:solidFill>
-              </a:rPr>
-              <a:t>대안마다 트랙터 최적 경로와 작업시간을 지도에 겹쳐 보여 준다. 땅을 더하지 않고 경로만 다시 짜는 "그대로" 안도 후보로 경쟁한다.</a:t>
-            </a:r>
-          </a:p>
-        </p:txBody>
-      </p:sp>
-      <p:sp>
-        <p:nvSpPr>
-          <p:cNvPr id="351" name="MVP 카드 3"/>
-          <p:cNvSpPr/>
-          <p:nvPr/>
-        </p:nvSpPr>
-        <p:spPr>
-          <a:xfrm>
-            <a:off x="7086600" y="4754879"/>
-            <a:ext cx="4617720" cy="1691640"/>
-          </a:xfrm>
-          <a:prstGeom prst="roundRect">
-            <a:avLst>
-              <a:gd name="adj" fmla="val 6000"/>
-            </a:avLst>
-          </a:prstGeom>
-          <a:solidFill>
-            <a:srgbClr val="EEF3F7"/>
-          </a:solidFill>
-          <a:ln>
-            <a:noFill/>
-          </a:ln>
-          <a:effectLst/>
-        </p:spPr>
-        <p:style>
-          <a:lnRef idx="1">
-            <a:schemeClr val="accent1"/>
-          </a:lnRef>
-          <a:fillRef idx="3">
-            <a:schemeClr val="accent1"/>
-          </a:fillRef>
-          <a:effectRef idx="2">
-            <a:schemeClr val="accent1"/>
-          </a:effectRef>
-          <a:fontRef idx="minor">
-            <a:schemeClr val="lt1"/>
-          </a:fontRef>
-        </p:style>
-        <p:txBody>
-          <a:bodyPr rtlCol="0" anchor="t" wrap="square" lIns="182880" rIns="182880" tIns="137160"/>
-          <a:lstStyle/>
-          <a:p>
-            <a:pPr algn="l" marL="0" indent="0">
-              <a:spcAft>
-                <a:spcPts val="400"/>
-              </a:spcAft>
-              <a:buNone/>
-            </a:pPr>
-            <a:r>
-              <a:rPr sz="1500" b="1">
-                <a:solidFill>
-                  <a:srgbClr val="1B5E7F"/>
-                </a:solidFill>
-              </a:rPr>
-              <a:t>MVP 3 · 배당 범위와 흉년</a:t>
-            </a:r>
-          </a:p>
-          <a:p>
-            <a:pPr algn="l" marL="0" indent="0">
-              <a:spcAft>
-                <a:spcPts val="200"/>
-              </a:spcAft>
-              <a:buNone/>
-            </a:pPr>
-            <a:r>
-              <a:rPr sz="1200" b="0">
-                <a:solidFill>
-                  <a:srgbClr val="262B33"/>
-                </a:solidFill>
-              </a:rPr>
-              <a:t>평당 배당을 확정값이 아닌 범위로 보여 주고, 작황 −20%·−30%일 때 배당형·고정 임차료형·혼합형 금액과 법인 유보금을 비교한다.</a:t>
-            </a:r>
-          </a:p>
-        </p:txBody>
-      </p:sp>
-    </p:spTree>
-  </p:cSld>
-  <p:clrMapOvr>
-    <a:masterClrMapping/>
-  </p:clrMapOvr>
-</p:sld>
-</file>
-
-<file path=ppt/slides/slide6.xml><?xml version="1.0" encoding="utf-8"?>
-<p:sld xmlns:a="http://schemas.openxmlformats.org/drawingml/2006/main" xmlns:r="http://schemas.openxmlformats.org/officeDocument/2006/relationships" xmlns:mc="http://schemas.openxmlformats.org/markup-compatibility/2006" xmlns:mv="urn:schemas-microsoft-com:mac:vml" xmlns:p="http://schemas.openxmlformats.org/presentationml/2006/main" xmlns:c="http://schemas.openxmlformats.org/drawingml/2006/chart" xmlns:dgm="http://schemas.openxmlformats.org/drawingml/2006/diagram" xmlns:o="urn:schemas-microsoft-com:office:office" xmlns:v="urn:schemas-microsoft-com:vml" xmlns:pvml="urn:schemas-microsoft-com:office:powerpoint" xmlns:com="http://schemas.openxmlformats.org/drawingml/2006/compatibility" xmlns:p14="http://schemas.microsoft.com/office/powerpoint/2010/main" xmlns:p15="http://schemas.microsoft.com/office/powerpoint/2012/main" xmlns:ahyp="http://schemas.microsoft.com/office/drawing/2018/hyperlinkcolor">
-  <p:cSld>
-    <p:spTree>
-      <p:nvGrpSpPr>
-        <p:cNvPr id="346" name="Shape 346"/>
-        <p:cNvGrpSpPr/>
-        <p:nvPr/>
-      </p:nvGrpSpPr>
-      <p:grpSpPr>
-        <a:xfrm>
-          <a:off x="0" y="0"/>
-          <a:ext cx="0" cy="0"/>
-          <a:chOff x="0" y="0"/>
-          <a:chExt cx="0" cy="0"/>
-        </a:xfrm>
-      </p:grpSpPr>
-      <p:sp>
-        <p:nvSpPr>
-          <p:cNvPr id="347" name="Google Shape;347;p3"/>
-          <p:cNvSpPr txBox="1"/>
-          <p:nvPr/>
-        </p:nvSpPr>
-        <p:spPr>
-          <a:xfrm>
-            <a:off x="501649" y="350244"/>
-            <a:ext cx="11155680" cy="461665"/>
-          </a:xfrm>
-          <a:prstGeom prst="rect">
-            <a:avLst/>
-          </a:prstGeom>
-          <a:noFill/>
-          <a:ln>
-            <a:noFill/>
-          </a:ln>
-        </p:spPr>
-        <p:txBody>
-          <a:bodyPr anchorCtr="0" anchor="t" bIns="45700" lIns="91425" spcFirstLastPara="1" rIns="91425" wrap="square" tIns="45700">
-            <a:spAutoFit/>
-          </a:bodyPr>
-          <a:lstStyle/>
-          <a:p>
-            <a:pPr indent="0" lvl="0" marL="0" marR="0" rtl="0" algn="l">
-              <a:lnSpc>
-                <a:spcPct val="100000"/>
-              </a:lnSpc>
-              <a:spcBef>
-                <a:spcPts val="0"/>
-              </a:spcBef>
-              <a:spcAft>
-                <a:spcPts val="200"/>
-              </a:spcAft>
-              <a:buClr>
-                <a:srgbClr val="262626"/>
-              </a:buClr>
-              <a:buSzPts val="2400"/>
-              <a:buNone/>
-            </a:pPr>
-            <a:r>
-              <a:rPr sz="2400" b="0">
-                <a:solidFill>
-                  <a:srgbClr val="262B33"/>
-                </a:solidFill>
-              </a:rPr>
-              <a:t>MVP 화면 — 거절로 지원 기준이 미달된 상황</a:t>
-            </a:r>
-            <a:endParaRPr/>
-          </a:p>
-        </p:txBody>
-      </p:sp>
-      <p:sp>
-        <p:nvSpPr>
-          <p:cNvPr id="348" name="화면 설명"/>
-          <p:cNvSpPr txBox="1"/>
-          <p:nvPr/>
-        </p:nvSpPr>
-        <p:spPr>
-          <a:xfrm>
-            <a:off x="502920" y="822960"/>
-            <a:ext cx="11155680" cy="320040"/>
-          </a:xfrm>
-          <a:prstGeom prst="rect">
-            <a:avLst/>
-          </a:prstGeom>
-          <a:noFill/>
-        </p:spPr>
-        <p:txBody>
-          <a:bodyPr wrap="square" anchor="t" lIns="45720" rIns="45720" tIns="27432" bIns="27432">
-            <a:spAutoFit/>
-          </a:bodyPr>
-          <a:lstStyle/>
-          <a:p>
-            <a:pPr marL="0" indent="0">
-              <a:spcAft>
-                <a:spcPts val="200"/>
-              </a:spcAft>
-              <a:buNone/>
-            </a:pPr>
-            <a:r>
-              <a:rPr sz="1200" b="0">
-                <a:solidFill>
-                  <a:srgbClr val="6B7280"/>
-                </a:solidFill>
-              </a:rPr>
-              <a:t>거절 2건 → 면적 19.6ha로 20ha 기준 미달 → "경작권 교환 + 필지 B 편입"이 최적 안. 화면 숫자는 가상 들녘 기반 예시</a:t>
-            </a:r>
-          </a:p>
-        </p:txBody>
-      </p:sp>
-      <p:pic>
-        <p:nvPicPr>
-          <p:cNvPr id="349" name="MVP 화면 상황 2" descr="screen2.png"/>
-          <p:cNvPicPr>
-            <a:picLocks noChangeAspect="1"/>
-          </p:cNvPicPr>
-          <p:nvPr/>
-        </p:nvPicPr>
-        <p:blipFill>
-          <a:blip r:embed="rId2"/>
-          <a:stretch>
-            <a:fillRect/>
-          </a:stretch>
-        </p:blipFill>
-        <p:spPr>
-          <a:xfrm>
-            <a:off x="1252728" y="1234440"/>
-            <a:ext cx="9692640" cy="5108829"/>
-          </a:xfrm>
-          <a:prstGeom prst="rect">
-            <a:avLst/>
-          </a:prstGeom>
-        </p:spPr>
-      </p:pic>
-    </p:spTree>
-  </p:cSld>
-  <p:clrMapOvr>
-    <a:masterClrMapping/>
-  </p:clrMapOvr>
-</p:sld>
-</file>
-
-<file path=ppt/slides/slide7.xml><?xml version="1.0" encoding="utf-8"?>
-<p:sld xmlns:a="http://schemas.openxmlformats.org/drawingml/2006/main" xmlns:r="http://schemas.openxmlformats.org/officeDocument/2006/relationships" xmlns:mc="http://schemas.openxmlformats.org/markup-compatibility/2006" xmlns:mv="urn:schemas-microsoft-com:mac:vml" xmlns:p="http://schemas.openxmlformats.org/presentationml/2006/main" xmlns:c="http://schemas.openxmlformats.org/drawingml/2006/chart" xmlns:dgm="http://schemas.openxmlformats.org/drawingml/2006/diagram" xmlns:o="urn:schemas-microsoft-com:office:office" xmlns:v="urn:schemas-microsoft-com:vml" xmlns:pvml="urn:schemas-microsoft-com:office:powerpoint" xmlns:com="http://schemas.openxmlformats.org/drawingml/2006/compatibility" xmlns:p14="http://schemas.microsoft.com/office/powerpoint/2010/main" xmlns:p15="http://schemas.microsoft.com/office/powerpoint/2012/main" xmlns:ahyp="http://schemas.microsoft.com/office/drawing/2018/hyperlinkcolor">
-  <p:cSld>
-    <p:spTree>
-      <p:nvGrpSpPr>
         <p:cNvPr id="387" name="Shape 387"/>
         <p:cNvGrpSpPr/>
         <p:nvPr/>
@@ -41290,18 +40932,32 @@
                           <a:spcPts val="0"/>
                         </a:spcBef>
                         <a:spcAft>
-                          <a:spcPts val="400"/>
+                          <a:spcPts val="800"/>
                         </a:spcAft>
                         <a:buFont typeface="Arial"/>
                         <a:buChar char="•"/>
                       </a:pPr>
                       <a:r>
-                        <a:rPr sz="1300" b="0">
+                        <a:rPr sz="1400">
+                          <a:solidFill>
+                            <a:srgbClr val="1B5E7F"/>
+                          </a:solidFill>
+                          <a:latin typeface="Freesentation 6 SemiBold"/>
+                          <a:ea typeface="Freesentation 6 SemiBold"/>
+                          <a:cs typeface="Freesentation 6 SemiBold"/>
+                        </a:rPr>
+                        <a:t>구멍의 진짜 비용은 경로가 아니라 기준 미달이다.  </a:t>
+                      </a:r>
+                      <a:r>
+                        <a:rPr sz="1400">
                           <a:solidFill>
                             <a:srgbClr val="262B33"/>
                           </a:solidFill>
+                          <a:latin typeface="Freesentation 4 Regular"/>
+                          <a:ea typeface="Freesentation 4 Regular"/>
+                          <a:cs typeface="Freesentation 4 Regular"/>
                         </a:rPr>
-                        <a:t>구멍의 진짜 비용은 트랙터 경로가 아니라 지원 면적 기준 미달이다. 가상 들녘에서 1명이 거절하면 순이익 감소의 94%는 빠진 땅 몫이고, 경로·기계비 증가는 6%였다.</a:t>
+                        <a:t>첫 문제 가설("트랙터 경로 때문에 생산비가 크게 는다")은 시뮬레이션에서 기각됐다. 1명 거절 시 순이익 감소의 94%는 빠진 땅 몫, 경로·기계비는 6%였다.</a:t>
                       </a:r>
                       <a:endParaRPr sz="1600">
                         <a:latin typeface="Arial"/>
@@ -41316,18 +40972,32 @@
                           <a:spcPts val="0"/>
                         </a:spcBef>
                         <a:spcAft>
-                          <a:spcPts val="400"/>
+                          <a:spcPts val="800"/>
                         </a:spcAft>
                         <a:buFont typeface="Arial"/>
                         <a:buChar char="•"/>
                       </a:pPr>
                       <a:r>
-                        <a:rPr sz="1300" b="0">
+                        <a:rPr sz="1400">
+                          <a:solidFill>
+                            <a:srgbClr val="1B5E7F"/>
+                          </a:solidFill>
+                          <a:latin typeface="Freesentation 6 SemiBold"/>
+                          <a:ea typeface="Freesentation 6 SemiBold"/>
+                          <a:cs typeface="Freesentation 6 SemiBold"/>
+                        </a:rPr>
+                        <a:t>목표는 총 순수익보다 평당 배당이다.  </a:t>
+                      </a:r>
+                      <a:r>
+                        <a:rPr sz="1400">
                           <a:solidFill>
                             <a:srgbClr val="262B33"/>
                           </a:solidFill>
+                          <a:latin typeface="Freesentation 4 Regular"/>
+                          <a:ea typeface="Freesentation 4 Regular"/>
+                          <a:cs typeface="Freesentation 4 Regular"/>
                         </a:rPr>
-                        <a:t>목표는 총 순수익보다 평당 배당으로 잡아야 한다. 땅과 배당받을 사람이 함께 빠져서, 총 순수익이 6% 줄어도 남은 조합원 평당 배당은 약 1%만 준다.</a:t>
+                        <a:t>땅과 배당받을 사람이 함께 빠져, 총 순수익이 6% 줄어도 남은 조합원 평당 배당은 약 1%만 준다.</a:t>
                       </a:r>
                     </a:p>
                     <a:p>
@@ -41336,18 +41006,32 @@
                           <a:spcPts val="0"/>
                         </a:spcBef>
                         <a:spcAft>
-                          <a:spcPts val="400"/>
+                          <a:spcPts val="800"/>
                         </a:spcAft>
                         <a:buFont typeface="Arial"/>
                         <a:buChar char="•"/>
                       </a:pPr>
                       <a:r>
-                        <a:rPr sz="1300" b="0">
+                        <a:rPr sz="1400">
+                          <a:solidFill>
+                            <a:srgbClr val="1B5E7F"/>
+                          </a:solidFill>
+                          <a:latin typeface="Freesentation 6 SemiBold"/>
+                          <a:ea typeface="Freesentation 6 SemiBold"/>
+                          <a:cs typeface="Freesentation 6 SemiBold"/>
+                        </a:rPr>
+                        <a:t>배당은 범위로, 흉년은 따로 보여 줘야 설득된다.  </a:t>
+                      </a:r>
+                      <a:r>
+                        <a:rPr sz="1400">
                           <a:solidFill>
                             <a:srgbClr val="262B33"/>
                           </a:solidFill>
+                          <a:latin typeface="Freesentation 4 Regular"/>
+                          <a:ea typeface="Freesentation 4 Regular"/>
+                          <a:cs typeface="Freesentation 4 Regular"/>
                         </a:rPr>
-                        <a:t>배당은 확정값이 아니라 범위로, 흉년은 따로 보여 줘야 설득력이 있다. 흉년 손실을 고정 임차료형은 법인이, 배당형은 조합원이 진다.</a:t>
+                        <a:t>흉년 손실을 고정 임차료형은 법인이, 배당형은 조합원이 진다.</a:t>
                       </a:r>
                     </a:p>
                     <a:p>
@@ -41362,12 +41046,26 @@
                         <a:buChar char="•"/>
                       </a:pPr>
                       <a:r>
-                        <a:rPr sz="1300" b="0">
+                        <a:rPr sz="1400">
+                          <a:solidFill>
+                            <a:srgbClr val="1B5E7F"/>
+                          </a:solidFill>
+                          <a:latin typeface="Freesentation 6 SemiBold"/>
+                          <a:ea typeface="Freesentation 6 SemiBold"/>
+                          <a:cs typeface="Freesentation 6 SemiBold"/>
+                        </a:rPr>
+                        <a:t>고객은 B2B 구조다.  </a:t>
+                      </a:r>
+                      <a:r>
+                        <a:rPr sz="1400">
                           <a:solidFill>
                             <a:srgbClr val="262B33"/>
                           </a:solidFill>
+                          <a:latin typeface="Freesentation 4 Regular"/>
+                          <a:ea typeface="Freesentation 4 Regular"/>
+                          <a:cs typeface="Freesentation 4 Regular"/>
                         </a:rPr>
-                        <a:t>경작권 교환은 설득 부담이 가장 작은 카드지만 면적은 늘리지 못한다. 기준 미달일 때는 땅 추가와 묶어야 한다.</a:t>
+                        <a:t>사무장이 쓰고, 대표가 정하고, 법인이 비용을 낸다. 상위 3개 원형부터 인터뷰한다.</a:t>
                       </a:r>
                     </a:p>
                   </a:txBody>
@@ -41444,12 +41142,15 @@
                         <a:buNone/>
                       </a:pPr>
                       <a:r>
-                        <a:rPr sz="1300" b="0">
+                        <a:rPr sz="1300">
                           <a:solidFill>
                             <a:srgbClr val="6B7280"/>
                           </a:solidFill>
+                          <a:latin typeface="Freesentation 4 Regular"/>
+                          <a:ea typeface="Freesentation 4 Regular"/>
+                          <a:cs typeface="Freesentation 4 Regular"/>
                         </a:rPr>
-                        <a:t>(팀원 소감 작성)</a:t>
+                        <a:t>(팀원 소감 기입)</a:t>
                       </a:r>
                       <a:endParaRPr sz="1600">
                         <a:latin typeface="Arial"/>

--- a/docs/공동영농_최종발표.pptx
+++ b/docs/공동영농_최종발표.pptx
@@ -1611,7 +1611,7 @@
           <a:lstStyle/>
           <a:p>
             <a:r>
-              <a:t>의도: 공동영농 법인이 참여 농가를 설득하다가 거절이 나왔을 때, 그 한 건이 지원 자격(면적 기준)과 조합원 평당 배당에 주는 영향을 즉시 보여 주는 의사결정 도구다. 가치제안(❶)을 기준점으로 고객군 → 채널 → 고객 관계 → 수익 → 핵심 활동·자원·파트너 → 비용 순서로 모든 블록을 "~할 것이다" 가설로 적었다. 핵심 자원의 프로토타입만 확인된 사실이고 나머지는 인터뷰로 검증할 가설이다.</a:t>
+              <a:t>의도: 공동영농 법인이 참여 농가를 설득하다가 거절이 나왔을 때, 그 한 건이 지원 자격(면적 기준)과 조합원 평당 배당에 주는 영향을 즉시 보여 주는 의사결정 도구다. 가치제안(❶)을 기준점으로 고객군 → 채널 → 고객 관계 → 수익 → 핵심 활동·자원·파트너 → 비용 순서로 모든 블록을 "~할 것이다" 가설로 적었다. 핵심 자원의 프로토타입만 확인된 사실이고 나머지는 인터뷰로 검증할 가설이다. 수익 흐름 근거: 2025년산 논벼 10a당 직접생산비는 경영주 70세 이상 68.6만 원, 5ha 이상 농가 50.8만 원이다(국가데이터처, 2026.3.27). 법인 규모로 지으면 ha당 연 178만 원(25.9%)이 줄고, 거절 1건(1.7ha)이 빠지면 연 약 300만 원이 새어 나간다. 구독료는 그 3분의 1 수준인 ha당 연 2만 원으로, 미국 농업 소프트웨어 이용자 절반이 에이커당 연 5달러 미만(ha당 약 1.7만 원)을 내는 것과 비슷하다(Purdue 2019). 시범사업 예산은 식량작물공동경영체 교육·컨설팅 개소당 3천만 원(전남 2024) 사례에 맞췄다. 금액은 인터뷰로 검증한다.</a:t>
             </a:r>
           </a:p>
         </p:txBody>
@@ -36306,7 +36306,7 @@
           <a:p>
             <a:pPr marL="0" indent="0">
               <a:spcAft>
-                <a:spcPts val="400"/>
+                <a:spcPts val="300"/>
               </a:spcAft>
               <a:buNone/>
             </a:pPr>
@@ -36331,7 +36331,18 @@
               <a:buChar char="•"/>
             </a:pPr>
             <a:r>
-              <a:rPr sz="1100">
+              <a:rPr sz="1050">
+                <a:solidFill>
+                  <a:srgbClr val="1B5E7F"/>
+                </a:solidFill>
+                <a:latin typeface="Freesentation 6 SemiBold"/>
+                <a:ea typeface="Freesentation 6 SemiBold"/>
+                <a:cs typeface="Freesentation 6 SemiBold"/>
+              </a:rPr>
+              <a:t>법인 구독  </a:t>
+            </a:r>
+            <a:r>
+              <a:rPr sz="1050">
                 <a:solidFill>
                   <a:srgbClr val="262B33"/>
                 </a:solidFill>
@@ -36339,7 +36350,7 @@
                 <a:ea typeface="Freesentation 4 Regular"/>
                 <a:cs typeface="Freesentation 4 Regular"/>
               </a:rPr>
-              <a:t>법인은 단지 1곳당 연 구독료를, 지자체는 시범사업 용역비를 낼 것이다</a:t>
+              <a:t>ha당 연 2만 원 (50ha 단지 연 100만 원). 거절 1건(1.7ha)을 메워 되찾는 생산비 절감 연 약 300만 원의 3분의 1</a:t>
             </a:r>
           </a:p>
           <a:p>
@@ -36351,7 +36362,37 @@
               <a:buChar char="•"/>
             </a:pPr>
             <a:r>
-              <a:rPr sz="1100">
+              <a:rPr sz="1050">
+                <a:solidFill>
+                  <a:srgbClr val="1B5E7F"/>
+                </a:solidFill>
+                <a:latin typeface="Freesentation 6 SemiBold"/>
+                <a:ea typeface="Freesentation 6 SemiBold"/>
+                <a:cs typeface="Freesentation 6 SemiBold"/>
+              </a:rPr>
+              <a:t>시범사업 예산  </a:t>
+            </a:r>
+            <a:r>
+              <a:rPr sz="1050">
+                <a:solidFill>
+                  <a:srgbClr val="262B33"/>
+                </a:solidFill>
+                <a:latin typeface="Freesentation 4 Regular"/>
+                <a:ea typeface="Freesentation 4 Regular"/>
+                <a:cs typeface="Freesentation 4 Regular"/>
+              </a:rPr>
+              <a:t>교육·컨설팅 항목으로 단지당 연 1,000만 원 (컨설팅 예산 개소당 3천만 원 사례)</a:t>
+            </a:r>
+          </a:p>
+          <a:p>
+            <a:pPr marL="0" indent="0">
+              <a:spcAft>
+                <a:spcPts val="200"/>
+              </a:spcAft>
+              <a:buNone/>
+            </a:pPr>
+            <a:r>
+              <a:rPr sz="950">
                 <a:solidFill>
                   <a:srgbClr val="6B7280"/>
                 </a:solidFill>
@@ -36359,7 +36400,7 @@
                 <a:ea typeface="Freesentation 4 Regular"/>
                 <a:cs typeface="Freesentation 4 Regular"/>
               </a:rPr>
-              <a:t>금액은 "지난해 사업계획·필지 정리에 쓴 외부 비용" 인터뷰로 검증한다</a:t>
+              <a:t>근거: 10a당 직접생산비 70세 이상 68.6만 → 5ha 이상 50.8만 원 (국가데이터처 2025년산 논벼 생산비조사)</a:t>
             </a:r>
           </a:p>
         </p:txBody>

--- a/docs/공동영농_최종발표.pptx
+++ b/docs/공동영농_최종발표.pptx
@@ -35639,7 +35639,7 @@
           <a:p>
             <a:pPr marL="0" indent="0">
               <a:spcAft>
-                <a:spcPts val="400"/>
+                <a:spcPts val="300"/>
               </a:spcAft>
               <a:buNone/>
             </a:pPr>
@@ -35656,15 +35656,25 @@
             </a:r>
           </a:p>
           <a:p>
-            <a:pPr marL="139700" indent="-139700">
+            <a:pPr marL="0" indent="0">
               <a:spcAft>
                 <a:spcPts val="200"/>
               </a:spcAft>
-              <a:buFont typeface="Arial"/>
-              <a:buChar char="•"/>
+              <a:buNone/>
             </a:pPr>
             <a:r>
-              <a:rPr sz="1100">
+              <a:rPr sz="1050">
+                <a:solidFill>
+                  <a:srgbClr val="1B5E7F"/>
+                </a:solidFill>
+                <a:latin typeface="Freesentation 6 SemiBold"/>
+                <a:ea typeface="Freesentation 6 SemiBold"/>
+                <a:cs typeface="Freesentation 6 SemiBold"/>
+              </a:rPr>
+              <a:t>1  대체 필지 추천  </a:t>
+            </a:r>
+            <a:r>
+              <a:rPr sz="1050">
                 <a:solidFill>
                   <a:srgbClr val="262B33"/>
                 </a:solidFill>
@@ -35672,19 +35682,29 @@
                 <a:ea typeface="Freesentation 4 Regular"/>
                 <a:cs typeface="Freesentation 4 Regular"/>
               </a:rPr>
-              <a:t>거절 재계산 엔진 운영, 들녘별 자료 보정을 할 것이다</a:t>
+              <a:t>최소 면적과 목표 순수익을 맞추는 땅</a:t>
             </a:r>
           </a:p>
           <a:p>
-            <a:pPr marL="139700" indent="-139700">
+            <a:pPr marL="0" indent="0">
               <a:spcAft>
                 <a:spcPts val="200"/>
               </a:spcAft>
-              <a:buFont typeface="Arial"/>
-              <a:buChar char="•"/>
+              <a:buNone/>
             </a:pPr>
             <a:r>
-              <a:rPr sz="1100">
+              <a:rPr sz="1050">
+                <a:solidFill>
+                  <a:srgbClr val="1B5E7F"/>
+                </a:solidFill>
+                <a:latin typeface="Freesentation 6 SemiBold"/>
+                <a:ea typeface="Freesentation 6 SemiBold"/>
+                <a:cs typeface="Freesentation 6 SemiBold"/>
+              </a:rPr>
+              <a:t>2  기계비 최소 경로  </a:t>
+            </a:r>
+            <a:r>
+              <a:rPr sz="1050">
                 <a:solidFill>
                   <a:srgbClr val="262B33"/>
                 </a:solidFill>
@@ -35692,7 +35712,56 @@
                 <a:ea typeface="Freesentation 4 Regular"/>
                 <a:cs typeface="Freesentation 4 Regular"/>
               </a:rPr>
-              <a:t>핵심지표: 재설계 소요일, 기준 충족 단지 수</a:t>
+              <a:t>빈 필드를 빼도 면적이 되면 그대로 갈 때 배당금</a:t>
+            </a:r>
+          </a:p>
+          <a:p>
+            <a:pPr marL="0" indent="0">
+              <a:spcAft>
+                <a:spcPts val="200"/>
+              </a:spcAft>
+              <a:buNone/>
+            </a:pPr>
+            <a:r>
+              <a:rPr sz="1050">
+                <a:solidFill>
+                  <a:srgbClr val="1B5E7F"/>
+                </a:solidFill>
+                <a:latin typeface="Freesentation 6 SemiBold"/>
+                <a:ea typeface="Freesentation 6 SemiBold"/>
+                <a:cs typeface="Freesentation 6 SemiBold"/>
+              </a:rPr>
+              <a:t>3  배당금 · 흉년  </a:t>
+            </a:r>
+            <a:r>
+              <a:rPr sz="1050">
+                <a:solidFill>
+                  <a:srgbClr val="262B33"/>
+                </a:solidFill>
+                <a:latin typeface="Freesentation 4 Regular"/>
+                <a:ea typeface="Freesentation 4 Regular"/>
+                <a:cs typeface="Freesentation 4 Regular"/>
+              </a:rPr>
+              <a:t>경우별 배당금과 흉년 때 변화</a:t>
+            </a:r>
+          </a:p>
+          <a:p>
+            <a:pPr marL="0" indent="0">
+              <a:spcAft>
+                <a:spcPts val="200"/>
+              </a:spcAft>
+              <a:buNone/>
+            </a:pPr>
+            <a:r>
+              <a:rPr sz="950">
+                <a:solidFill>
+                  <a:srgbClr val="6B7280"/>
+                </a:solidFill>
+                <a:latin typeface="Freesentation 4 Regular"/>
+                <a:ea typeface="Freesentation 4 Regular"/>
+                <a:cs typeface="Freesentation 4 Regular"/>
+              </a:rPr>
+              <a:t>필지를 클릭해 해제하면 바로 계산</a:t>
             </a:r>
           </a:p>
         </p:txBody>
@@ -35875,7 +35944,7 @@
                 <a:ea typeface="Freesentation 4 Regular"/>
                 <a:cs typeface="Freesentation 4 Regular"/>
               </a:rPr>
-              <a:t>대체 필지·경작권 교환 후보 최적 1 + 예비 2</a:t>
+              <a:t>후보 제안 3단계: 기본 필지화 → 구멍·기준 충족 → 구멍·기준 미충족</a:t>
             </a:r>
           </a:p>
           <a:p>
@@ -38632,7 +38701,7 @@
                     <a:ea typeface="Freesentation 4 Regular"/>
                     <a:cs typeface="Freesentation 4 Regular"/>
                   </a:rPr>
-                  <a:t>거절 필지 하나가 지원 기준과 평당 배당에 주는 영향을 1초 안에 판정하고, 기준을 지키는 대안을 최적 1 + 예비 2로 제시한다</a:t>
+                  <a:t>거절 필지 하나가 지원 기준과 평당 배당에 주는 영향을 1초 안에 판정하고, 기본 → 구멍·기준 충족 → 구멍·기준 미충족 3단계로 대안을 제시한다</a:t>
                 </a:r>
                 <a:endParaRPr b="0" i="0" sz="1100" u="none" cap="none" strike="noStrike">
                   <a:solidFill>

--- a/docs/공동영농_최종발표.pptx
+++ b/docs/공동영농_최종발표.pptx
@@ -1824,7 +1824,7 @@
           <a:lstStyle/>
           <a:p>
             <a:r>
-              <a:t>질문 원칙: 의견이 아니라 경험한 상황을 묻는다(마지막 경험, 시간·비용, 실제 행동). 개방형으로 묻는다. "쓰시겠어요?", "얼마 내시겠어요?" 같은 미래형·평가 질문은 하지 않는다. 순서: 문제 탐색 → 문제 강도 → 기존 대안. 솔루션 질문은 고객·문제 가설(CPF)을 확인한 뒤에만 한다.</a:t>
+              <a:t>질문 원칙: 의견이 아니라 경험한 상황을 묻는다(마지막 경험, 시간·비용, 실제 행동). 개방형으로 묻는다. "쓰시겠어요?", "얼마 내시겠어요?" 같은 미래형·평가 질문은 하지 않는다. 순서: 문제 탐색 → 문제 강도 → 기존 대안. 솔루션 가설은 우리 제품이 아니라 해결 방식(거절 당일 기준·배당 영향과 대체 땅을 숫자로 아는 것)에 대한 가설이다. 제품을 보여 주지 않고, 지난 거절 때 무엇을 기다리느라 늦었는지를 물어 그 방식이 필요한지 검증한다.</a:t>
             </a:r>
           </a:p>
         </p:txBody>
@@ -39768,7 +39768,7 @@
                           <a:ea typeface="Freesentation 4 Regular"/>
                           <a:cs typeface="Freesentation 4 Regular"/>
                         </a:rPr>
-                        <a:t>거절 필지를 누르면 기준 판정·대체 후보·평당 배당 범위가 나오면, 대안 결정이 1일 안에 끝날 것이다</a:t>
+                        <a:t>거절 당일 "빠져도 기준·배당이 유지되는지"와 "메울 땅이 어디인지"를 숫자로 알 수 있으면, 사무장은 빼고 갈지·메울지를 바로 정하고 설득을 멈추지 않을 것이다</a:t>
                       </a:r>
                       <a:endParaRPr/>
                     </a:p>
@@ -39835,7 +39835,7 @@
                           <a:ea typeface="Freesentation 4 Regular"/>
                           <a:cs typeface="Freesentation 4 Regular"/>
                         </a:rPr>
-                        <a:t>(문제 확인 뒤) 지난 거절 사례를 이 화면에 넣어 보면, 그때 실제로 고른 땅과 무엇이 같고 다른가요?</a:t>
+                        <a:t>지난 거절 뒤 결정을 내리기까지 어떤 정보를 누구에게서 받아야 했나요? 그중 가장 오래 기다린 것은 무엇이었나요?</a:t>
                       </a:r>
                       <a:endParaRPr/>
                     </a:p>
@@ -40105,7 +40105,7 @@
                           <a:ea typeface="Freesentation 4 Regular"/>
                           <a:cs typeface="Freesentation 4 Regular"/>
                         </a:rPr>
-                        <a:t>사무장은 거절로 생긴 구멍 때문에 지원 자격과 배당 설명이 막히고, 시뮬레이터로 재설계 기간이 2주에서 1일로 줄 것이다</a:t>
+                        <a:t>사무장은 거절로 생긴 구멍이 기준·배당에 주는 영향을 바로 알 수 없어 재설계에 2주 이상 쓰고, 그 영향과 메울 땅을 당일 숫자로 알면 1일 안에 끝낼 것이다</a:t>
                       </a:r>
                       <a:endParaRPr/>
                     </a:p>
